--- a/crypto_03_currencies.pptx
+++ b/crypto_03_currencies.pptx
@@ -697,7 +697,7 @@
           <a:lstStyle/>
           <a:p>
             <a:fld id="{EB1FAE4C-5332-014D-8E1B-BB8DA73EF81D}" type="datetimeFigureOut">
-              <a:t>4/13/22</a:t>
+              <a:t>4/21/22</a:t>
             </a:fld>
             <a:endParaRPr lang="en-US"/>
           </a:p>
@@ -866,7 +866,7 @@
           <a:lstStyle/>
           <a:p>
             <a:fld id="{EB1FAE4C-5332-014D-8E1B-BB8DA73EF81D}" type="datetimeFigureOut">
-              <a:t>4/13/22</a:t>
+              <a:t>4/21/22</a:t>
             </a:fld>
             <a:endParaRPr lang="en-US"/>
           </a:p>
@@ -1045,7 +1045,7 @@
           <a:lstStyle/>
           <a:p>
             <a:fld id="{EB1FAE4C-5332-014D-8E1B-BB8DA73EF81D}" type="datetimeFigureOut">
-              <a:t>4/13/22</a:t>
+              <a:t>4/21/22</a:t>
             </a:fld>
             <a:endParaRPr lang="en-US"/>
           </a:p>
@@ -1214,7 +1214,7 @@
           <a:lstStyle/>
           <a:p>
             <a:fld id="{EB1FAE4C-5332-014D-8E1B-BB8DA73EF81D}" type="datetimeFigureOut">
-              <a:t>4/13/22</a:t>
+              <a:t>4/21/22</a:t>
             </a:fld>
             <a:endParaRPr lang="en-US"/>
           </a:p>
@@ -1460,7 +1460,7 @@
           <a:lstStyle/>
           <a:p>
             <a:fld id="{EB1FAE4C-5332-014D-8E1B-BB8DA73EF81D}" type="datetimeFigureOut">
-              <a:t>4/13/22</a:t>
+              <a:t>4/21/22</a:t>
             </a:fld>
             <a:endParaRPr lang="en-US"/>
           </a:p>
@@ -1690,7 +1690,7 @@
           <a:lstStyle/>
           <a:p>
             <a:fld id="{EB1FAE4C-5332-014D-8E1B-BB8DA73EF81D}" type="datetimeFigureOut">
-              <a:t>4/13/22</a:t>
+              <a:t>4/21/22</a:t>
             </a:fld>
             <a:endParaRPr lang="en-US"/>
           </a:p>
@@ -2055,7 +2055,7 @@
           <a:lstStyle/>
           <a:p>
             <a:fld id="{EB1FAE4C-5332-014D-8E1B-BB8DA73EF81D}" type="datetimeFigureOut">
-              <a:t>4/13/22</a:t>
+              <a:t>4/21/22</a:t>
             </a:fld>
             <a:endParaRPr lang="en-US"/>
           </a:p>
@@ -2173,7 +2173,7 @@
           <a:lstStyle/>
           <a:p>
             <a:fld id="{EB1FAE4C-5332-014D-8E1B-BB8DA73EF81D}" type="datetimeFigureOut">
-              <a:t>4/13/22</a:t>
+              <a:t>4/21/22</a:t>
             </a:fld>
             <a:endParaRPr lang="en-US"/>
           </a:p>
@@ -2269,7 +2269,7 @@
           <a:lstStyle/>
           <a:p>
             <a:fld id="{EB1FAE4C-5332-014D-8E1B-BB8DA73EF81D}" type="datetimeFigureOut">
-              <a:t>4/13/22</a:t>
+              <a:t>4/21/22</a:t>
             </a:fld>
             <a:endParaRPr lang="en-US"/>
           </a:p>
@@ -2544,7 +2544,7 @@
           <a:lstStyle/>
           <a:p>
             <a:fld id="{EB1FAE4C-5332-014D-8E1B-BB8DA73EF81D}" type="datetimeFigureOut">
-              <a:t>4/13/22</a:t>
+              <a:t>4/21/22</a:t>
             </a:fld>
             <a:endParaRPr lang="en-US"/>
           </a:p>
@@ -2800,7 +2800,7 @@
           <a:lstStyle/>
           <a:p>
             <a:fld id="{EB1FAE4C-5332-014D-8E1B-BB8DA73EF81D}" type="datetimeFigureOut">
-              <a:t>4/13/22</a:t>
+              <a:t>4/21/22</a:t>
             </a:fld>
             <a:endParaRPr lang="en-US"/>
           </a:p>
@@ -3012,7 +3012,7 @@
           </a:lstStyle>
           <a:p>
             <a:fld id="{EB1FAE4C-5332-014D-8E1B-BB8DA73EF81D}" type="datetimeFigureOut">
-              <a:t>4/13/22</a:t>
+              <a:t>4/21/22</a:t>
             </a:fld>
             <a:endParaRPr lang="en-US"/>
           </a:p>
@@ -3671,7 +3671,7 @@
         <p:spPr>
           <a:xfrm>
             <a:off x="92502" y="1471494"/>
-            <a:ext cx="6377815" cy="3108543"/>
+            <a:ext cx="6551366" cy="3108543"/>
           </a:xfrm>
           <a:prstGeom prst="rect">
             <a:avLst/>

--- a/crypto_03_currencies.pptx
+++ b/crypto_03_currencies.pptx
@@ -5,7 +5,7 @@
     <p:sldMasterId id="2147483834" r:id="rId1"/>
   </p:sldMasterIdLst>
   <p:notesMasterIdLst>
-    <p:notesMasterId r:id="rId16"/>
+    <p:notesMasterId r:id="rId14"/>
   </p:notesMasterIdLst>
   <p:sldIdLst>
     <p:sldId id="308" r:id="rId2"/>
@@ -14,14 +14,12 @@
     <p:sldId id="301" r:id="rId5"/>
     <p:sldId id="263" r:id="rId6"/>
     <p:sldId id="274" r:id="rId7"/>
-    <p:sldId id="294" r:id="rId8"/>
-    <p:sldId id="293" r:id="rId9"/>
-    <p:sldId id="307" r:id="rId10"/>
-    <p:sldId id="309" r:id="rId11"/>
-    <p:sldId id="310" r:id="rId12"/>
-    <p:sldId id="278" r:id="rId13"/>
-    <p:sldId id="311" r:id="rId14"/>
-    <p:sldId id="261" r:id="rId15"/>
+    <p:sldId id="293" r:id="rId8"/>
+    <p:sldId id="309" r:id="rId9"/>
+    <p:sldId id="310" r:id="rId10"/>
+    <p:sldId id="278" r:id="rId11"/>
+    <p:sldId id="311" r:id="rId12"/>
+    <p:sldId id="261" r:id="rId13"/>
   </p:sldIdLst>
   <p:sldSz cx="12192000" cy="6858000"/>
   <p:notesSz cx="6858000" cy="9144000"/>
@@ -697,7 +695,7 @@
           <a:lstStyle/>
           <a:p>
             <a:fld id="{EB1FAE4C-5332-014D-8E1B-BB8DA73EF81D}" type="datetimeFigureOut">
-              <a:t>4/21/22</a:t>
+              <a:t>5/2/22</a:t>
             </a:fld>
             <a:endParaRPr lang="en-US"/>
           </a:p>
@@ -866,7 +864,7 @@
           <a:lstStyle/>
           <a:p>
             <a:fld id="{EB1FAE4C-5332-014D-8E1B-BB8DA73EF81D}" type="datetimeFigureOut">
-              <a:t>4/21/22</a:t>
+              <a:t>5/2/22</a:t>
             </a:fld>
             <a:endParaRPr lang="en-US"/>
           </a:p>
@@ -1045,7 +1043,7 @@
           <a:lstStyle/>
           <a:p>
             <a:fld id="{EB1FAE4C-5332-014D-8E1B-BB8DA73EF81D}" type="datetimeFigureOut">
-              <a:t>4/21/22</a:t>
+              <a:t>5/2/22</a:t>
             </a:fld>
             <a:endParaRPr lang="en-US"/>
           </a:p>
@@ -1214,7 +1212,7 @@
           <a:lstStyle/>
           <a:p>
             <a:fld id="{EB1FAE4C-5332-014D-8E1B-BB8DA73EF81D}" type="datetimeFigureOut">
-              <a:t>4/21/22</a:t>
+              <a:t>5/2/22</a:t>
             </a:fld>
             <a:endParaRPr lang="en-US"/>
           </a:p>
@@ -1460,7 +1458,7 @@
           <a:lstStyle/>
           <a:p>
             <a:fld id="{EB1FAE4C-5332-014D-8E1B-BB8DA73EF81D}" type="datetimeFigureOut">
-              <a:t>4/21/22</a:t>
+              <a:t>5/2/22</a:t>
             </a:fld>
             <a:endParaRPr lang="en-US"/>
           </a:p>
@@ -1690,7 +1688,7 @@
           <a:lstStyle/>
           <a:p>
             <a:fld id="{EB1FAE4C-5332-014D-8E1B-BB8DA73EF81D}" type="datetimeFigureOut">
-              <a:t>4/21/22</a:t>
+              <a:t>5/2/22</a:t>
             </a:fld>
             <a:endParaRPr lang="en-US"/>
           </a:p>
@@ -2055,7 +2053,7 @@
           <a:lstStyle/>
           <a:p>
             <a:fld id="{EB1FAE4C-5332-014D-8E1B-BB8DA73EF81D}" type="datetimeFigureOut">
-              <a:t>4/21/22</a:t>
+              <a:t>5/2/22</a:t>
             </a:fld>
             <a:endParaRPr lang="en-US"/>
           </a:p>
@@ -2173,7 +2171,7 @@
           <a:lstStyle/>
           <a:p>
             <a:fld id="{EB1FAE4C-5332-014D-8E1B-BB8DA73EF81D}" type="datetimeFigureOut">
-              <a:t>4/21/22</a:t>
+              <a:t>5/2/22</a:t>
             </a:fld>
             <a:endParaRPr lang="en-US"/>
           </a:p>
@@ -2269,7 +2267,7 @@
           <a:lstStyle/>
           <a:p>
             <a:fld id="{EB1FAE4C-5332-014D-8E1B-BB8DA73EF81D}" type="datetimeFigureOut">
-              <a:t>4/21/22</a:t>
+              <a:t>5/2/22</a:t>
             </a:fld>
             <a:endParaRPr lang="en-US"/>
           </a:p>
@@ -2544,7 +2542,7 @@
           <a:lstStyle/>
           <a:p>
             <a:fld id="{EB1FAE4C-5332-014D-8E1B-BB8DA73EF81D}" type="datetimeFigureOut">
-              <a:t>4/21/22</a:t>
+              <a:t>5/2/22</a:t>
             </a:fld>
             <a:endParaRPr lang="en-US"/>
           </a:p>
@@ -2800,7 +2798,7 @@
           <a:lstStyle/>
           <a:p>
             <a:fld id="{EB1FAE4C-5332-014D-8E1B-BB8DA73EF81D}" type="datetimeFigureOut">
-              <a:t>4/21/22</a:t>
+              <a:t>5/2/22</a:t>
             </a:fld>
             <a:endParaRPr lang="en-US"/>
           </a:p>
@@ -3012,7 +3010,7 @@
           </a:lstStyle>
           <a:p>
             <a:fld id="{EB1FAE4C-5332-014D-8E1B-BB8DA73EF81D}" type="datetimeFigureOut">
-              <a:t>4/21/22</a:t>
+              <a:t>5/2/22</a:t>
             </a:fld>
             <a:endParaRPr lang="en-US"/>
           </a:p>
@@ -3481,8 +3479,8 @@
         </p:nvSpPr>
         <p:spPr>
           <a:xfrm>
-            <a:off x="4577348" y="1796717"/>
-            <a:ext cx="4716379" cy="3293209"/>
+            <a:off x="4451098" y="1877372"/>
+            <a:ext cx="3289803" cy="2862322"/>
           </a:xfrm>
           <a:prstGeom prst="rect">
             <a:avLst/>
@@ -3500,7 +3498,7 @@
               <a:buChar char="•"/>
             </a:pPr>
             <a:r>
-              <a:rPr lang="en-US" sz="1600"/>
+              <a:rPr lang="en-US"/>
               <a:t>Solana</a:t>
             </a:r>
           </a:p>
@@ -3510,7 +3508,7 @@
               <a:buChar char="•"/>
             </a:pPr>
             <a:r>
-              <a:rPr lang="en-US" sz="1600"/>
+              <a:rPr lang="en-US"/>
               <a:t>Cardano</a:t>
             </a:r>
           </a:p>
@@ -3520,7 +3518,7 @@
               <a:buChar char="•"/>
             </a:pPr>
             <a:r>
-              <a:rPr lang="en-US" sz="1600"/>
+              <a:rPr lang="en-US"/>
               <a:t>Uniswap Protocol</a:t>
             </a:r>
           </a:p>
@@ -3530,7 +3528,7 @@
               <a:buChar char="•"/>
             </a:pPr>
             <a:r>
-              <a:rPr lang="en-US" sz="1600"/>
+              <a:rPr lang="en-US"/>
               <a:t>NFT = Non-fungible token</a:t>
             </a:r>
           </a:p>
@@ -3540,27 +3538,7 @@
               <a:buChar char="•"/>
             </a:pPr>
             <a:r>
-              <a:rPr lang="en-US" sz="1600"/>
-              <a:t>Stable Coins</a:t>
-            </a:r>
-          </a:p>
-          <a:p>
-            <a:pPr marL="380990" indent="-380990">
-              <a:buFont typeface="Arial" panose="020B0604020202020204" pitchFamily="34" charset="0"/>
-              <a:buChar char="•"/>
-            </a:pPr>
-            <a:r>
-              <a:rPr lang="en-US" sz="1600"/>
-              <a:t>Lightning Network</a:t>
-            </a:r>
-          </a:p>
-          <a:p>
-            <a:pPr marL="380990" indent="-380990">
-              <a:buFont typeface="Arial" panose="020B0604020202020204" pitchFamily="34" charset="0"/>
-              <a:buChar char="•"/>
-            </a:pPr>
-            <a:r>
-              <a:rPr lang="en-US" sz="1600"/>
+              <a:rPr lang="en-US"/>
               <a:t>Light Coin</a:t>
             </a:r>
           </a:p>
@@ -3570,7 +3548,7 @@
               <a:buChar char="•"/>
             </a:pPr>
             <a:r>
-              <a:rPr lang="en-US" sz="1600"/>
+              <a:rPr lang="en-US"/>
               <a:t>Bitcoin Cash, Bitcoin SV</a:t>
             </a:r>
           </a:p>
@@ -3580,17 +3558,7 @@
               <a:buChar char="•"/>
             </a:pPr>
             <a:r>
-              <a:rPr lang="en-US" sz="1600"/>
-              <a:t>Tether / USDT</a:t>
-            </a:r>
-          </a:p>
-          <a:p>
-            <a:pPr marL="380990" indent="-380990">
-              <a:buFont typeface="Arial" panose="020B0604020202020204" pitchFamily="34" charset="0"/>
-              <a:buChar char="•"/>
-            </a:pPr>
-            <a:r>
-              <a:rPr lang="en-US" sz="1600"/>
+              <a:rPr lang="en-US"/>
               <a:t>Avalanche, AVAX</a:t>
             </a:r>
           </a:p>
@@ -3600,7 +3568,7 @@
               <a:buChar char="•"/>
             </a:pPr>
             <a:r>
-              <a:rPr lang="en-US" sz="1600"/>
+              <a:rPr lang="en-US"/>
               <a:t>Dogecoin</a:t>
             </a:r>
           </a:p>
@@ -3610,7 +3578,7 @@
               <a:buChar char="•"/>
             </a:pPr>
             <a:r>
-              <a:rPr lang="en-US" sz="1600"/>
+              <a:rPr lang="en-US"/>
               <a:t>Million token</a:t>
             </a:r>
           </a:p>
@@ -3620,8 +3588,8 @@
               <a:buChar char="•"/>
             </a:pPr>
             <a:r>
-              <a:rPr lang="en-US" sz="1600"/>
-              <a:t>. . . </a:t>
+              <a:rPr lang="en-US"/>
+              <a:t>...</a:t>
             </a:r>
           </a:p>
         </p:txBody>
@@ -3640,961 +3608,6 @@
 </file>
 
 <file path=ppt/slides/slide10.xml><?xml version="1.0" encoding="utf-8"?>
-<p:sld xmlns:a="http://schemas.openxmlformats.org/drawingml/2006/main" xmlns:r="http://schemas.openxmlformats.org/officeDocument/2006/relationships" xmlns:p="http://schemas.openxmlformats.org/presentationml/2006/main">
-  <p:cSld>
-    <p:spTree>
-      <p:nvGrpSpPr>
-        <p:cNvPr id="1" name=""/>
-        <p:cNvGrpSpPr/>
-        <p:nvPr/>
-      </p:nvGrpSpPr>
-      <p:grpSpPr>
-        <a:xfrm>
-          <a:off x="0" y="0"/>
-          <a:ext cx="0" cy="0"/>
-          <a:chOff x="0" y="0"/>
-          <a:chExt cx="0" cy="0"/>
-        </a:xfrm>
-      </p:grpSpPr>
-      <p:sp>
-        <p:nvSpPr>
-          <p:cNvPr id="2" name="TextBox 1">
-            <a:extLst>
-              <a:ext uri="{FF2B5EF4-FFF2-40B4-BE49-F238E27FC236}">
-                <a16:creationId xmlns:a16="http://schemas.microsoft.com/office/drawing/2014/main" id="{0E12F5A1-E23C-9B4D-8BC3-88AE2CADE412}"/>
-              </a:ext>
-            </a:extLst>
-          </p:cNvPr>
-          <p:cNvSpPr txBox="1"/>
-          <p:nvPr/>
-        </p:nvSpPr>
-        <p:spPr>
-          <a:xfrm>
-            <a:off x="92502" y="1471494"/>
-            <a:ext cx="6551366" cy="3108543"/>
-          </a:xfrm>
-          <a:prstGeom prst="rect">
-            <a:avLst/>
-          </a:prstGeom>
-          <a:noFill/>
-        </p:spPr>
-        <p:txBody>
-          <a:bodyPr wrap="square" rtlCol="0">
-            <a:spAutoFit/>
-          </a:bodyPr>
-          <a:lstStyle/>
-          <a:p>
-            <a:pPr marL="380990" indent="-380990">
-              <a:buFont typeface="Arial" panose="020B0604020202020204" pitchFamily="34" charset="0"/>
-              <a:buChar char="•"/>
-            </a:pPr>
-            <a:r>
-              <a:rPr lang="en-US" sz="1400" b="1">
-                <a:solidFill>
-                  <a:srgbClr val="FF0000"/>
-                </a:solidFill>
-              </a:rPr>
-              <a:t>Avalanche (AVAX)</a:t>
-            </a:r>
-            <a:r>
-              <a:rPr lang="en-US" sz="1400"/>
-              <a:t> – since 2020 - a cryptocurrency and blockchain smart-contracts platform that rivals </a:t>
-            </a:r>
-            <a:r>
-              <a:rPr lang="en-US" sz="1400" b="1">
-                <a:solidFill>
-                  <a:srgbClr val="00B050"/>
-                </a:solidFill>
-              </a:rPr>
-              <a:t>Ethereum</a:t>
-            </a:r>
-            <a:endParaRPr lang="en-US" sz="1400"/>
-          </a:p>
-          <a:p>
-            <a:pPr marL="380990" indent="-380990">
-              <a:buFont typeface="Arial" panose="020B0604020202020204" pitchFamily="34" charset="0"/>
-              <a:buChar char="•"/>
-            </a:pPr>
-            <a:r>
-              <a:rPr lang="en-US" sz="1400" b="1">
-                <a:solidFill>
-                  <a:srgbClr val="FF0000"/>
-                </a:solidFill>
-              </a:rPr>
-              <a:t>Avalanche</a:t>
-            </a:r>
-            <a:r>
-              <a:rPr lang="en-US" sz="1400"/>
-              <a:t> is the fast – 4,500 transactions per second</a:t>
-            </a:r>
-          </a:p>
-          <a:p>
-            <a:pPr marL="380990" indent="-380990">
-              <a:buFont typeface="Arial" panose="020B0604020202020204" pitchFamily="34" charset="0"/>
-              <a:buChar char="•"/>
-            </a:pPr>
-            <a:r>
-              <a:rPr lang="en-US" sz="1400" b="1">
-                <a:solidFill>
-                  <a:srgbClr val="FF0000"/>
-                </a:solidFill>
-              </a:rPr>
-              <a:t>Avalanche</a:t>
-            </a:r>
-            <a:r>
-              <a:rPr lang="en-US" sz="1400"/>
-              <a:t> is open and open-source</a:t>
-            </a:r>
-          </a:p>
-          <a:p>
-            <a:pPr marL="380990" indent="-380990">
-              <a:buFont typeface="Arial" panose="020B0604020202020204" pitchFamily="34" charset="0"/>
-              <a:buChar char="•"/>
-            </a:pPr>
-            <a:r>
-              <a:rPr lang="en-US" sz="1400" b="1">
-                <a:solidFill>
-                  <a:srgbClr val="FF0000"/>
-                </a:solidFill>
-              </a:rPr>
-              <a:t>Avalanche</a:t>
-            </a:r>
-            <a:r>
-              <a:rPr lang="en-US" sz="1400"/>
-              <a:t> is low cost and eco-friendly</a:t>
-            </a:r>
-          </a:p>
-          <a:p>
-            <a:pPr marL="380990" indent="-380990">
-              <a:buFont typeface="Arial" panose="020B0604020202020204" pitchFamily="34" charset="0"/>
-              <a:buChar char="•"/>
-            </a:pPr>
-            <a:r>
-              <a:rPr lang="en-US" sz="1400" b="1">
-                <a:solidFill>
-                  <a:srgbClr val="FF0000"/>
-                </a:solidFill>
-              </a:rPr>
-              <a:t>AVAX</a:t>
-            </a:r>
-            <a:r>
-              <a:rPr lang="en-US" sz="1400"/>
-              <a:t> is the native token of the Avalanche blockchain</a:t>
-            </a:r>
-          </a:p>
-          <a:p>
-            <a:pPr marL="380990" indent="-380990">
-              <a:buFont typeface="Arial" panose="020B0604020202020204" pitchFamily="34" charset="0"/>
-              <a:buChar char="•"/>
-            </a:pPr>
-            <a:r>
-              <a:rPr lang="en-US" sz="1400"/>
-              <a:t>You can </a:t>
-            </a:r>
-            <a:r>
-              <a:rPr lang="en-US" sz="1400" b="1">
-                <a:solidFill>
-                  <a:srgbClr val="00B050"/>
-                </a:solidFill>
-              </a:rPr>
-              <a:t>launch Ethereum dApps</a:t>
-            </a:r>
-            <a:r>
-              <a:rPr lang="en-US" sz="1400"/>
-              <a:t> that confirm transactions instantly and process thousands of transactions per second</a:t>
-            </a:r>
-          </a:p>
-          <a:p>
-            <a:pPr marL="380990" indent="-380990">
-              <a:buFont typeface="Arial" panose="020B0604020202020204" pitchFamily="34" charset="0"/>
-              <a:buChar char="•"/>
-            </a:pPr>
-            <a:r>
-              <a:rPr lang="en-US" sz="1400" b="1">
-                <a:solidFill>
-                  <a:srgbClr val="00B050"/>
-                </a:solidFill>
-              </a:rPr>
-              <a:t>Deploy blockchains</a:t>
-            </a:r>
-            <a:r>
-              <a:rPr lang="en-US" sz="1400"/>
-              <a:t> that fit your own application needs </a:t>
-            </a:r>
-            <a:br>
-              <a:rPr lang="en-US" sz="1400"/>
-            </a:br>
-            <a:r>
-              <a:rPr lang="en-US" sz="1400"/>
-              <a:t>on your own virtual machine</a:t>
-            </a:r>
-          </a:p>
-          <a:p>
-            <a:pPr marL="380990" indent="-380990">
-              <a:buFont typeface="Arial" panose="020B0604020202020204" pitchFamily="34" charset="0"/>
-              <a:buChar char="•"/>
-            </a:pPr>
-            <a:r>
-              <a:rPr lang="en-US" sz="1400" b="1">
-                <a:solidFill>
-                  <a:srgbClr val="00B050"/>
-                </a:solidFill>
-              </a:rPr>
-              <a:t>Deploy subnets</a:t>
-            </a:r>
-            <a:r>
-              <a:rPr lang="en-US" sz="1400"/>
-              <a:t> that allow developers to define rules that can vary from the rule of the Primary Avalanche blockchain</a:t>
-            </a:r>
-          </a:p>
-          <a:p>
-            <a:pPr marL="380990" indent="-380990">
-              <a:buFont typeface="Arial" panose="020B0604020202020204" pitchFamily="34" charset="0"/>
-              <a:buChar char="•"/>
-            </a:pPr>
-            <a:r>
-              <a:rPr lang="en-US" sz="1400" b="1">
-                <a:solidFill>
-                  <a:srgbClr val="00B050"/>
-                </a:solidFill>
-              </a:rPr>
-              <a:t>Stake, or lock up</a:t>
-            </a:r>
-            <a:r>
-              <a:rPr lang="en-US" sz="1400"/>
-              <a:t>, your AVAX to help process transactions </a:t>
-            </a:r>
-            <a:br>
-              <a:rPr lang="en-US" sz="1400"/>
-            </a:br>
-            <a:r>
-              <a:rPr lang="en-US" sz="1400"/>
-              <a:t>and further secure the platform</a:t>
-            </a:r>
-          </a:p>
-        </p:txBody>
-      </p:sp>
-      <p:sp>
-        <p:nvSpPr>
-          <p:cNvPr id="3" name="TextBox 2">
-            <a:extLst>
-              <a:ext uri="{FF2B5EF4-FFF2-40B4-BE49-F238E27FC236}">
-                <a16:creationId xmlns:a16="http://schemas.microsoft.com/office/drawing/2014/main" id="{8A65183E-31B9-F343-87D9-54036A272EF7}"/>
-              </a:ext>
-            </a:extLst>
-          </p:cNvPr>
-          <p:cNvSpPr txBox="1"/>
-          <p:nvPr/>
-        </p:nvSpPr>
-        <p:spPr>
-          <a:xfrm>
-            <a:off x="0" y="1"/>
-            <a:ext cx="2939970" cy="523220"/>
-          </a:xfrm>
-          <a:prstGeom prst="rect">
-            <a:avLst/>
-          </a:prstGeom>
-          <a:noFill/>
-        </p:spPr>
-        <p:txBody>
-          <a:bodyPr wrap="square" rtlCol="0">
-            <a:spAutoFit/>
-          </a:bodyPr>
-          <a:lstStyle/>
-          <a:p>
-            <a:r>
-              <a:rPr lang="en-US" sz="2800" b="1"/>
-              <a:t>Avalanche, AVAX</a:t>
-            </a:r>
-          </a:p>
-        </p:txBody>
-      </p:sp>
-      <p:sp>
-        <p:nvSpPr>
-          <p:cNvPr id="4" name="TextBox 3">
-            <a:extLst>
-              <a:ext uri="{FF2B5EF4-FFF2-40B4-BE49-F238E27FC236}">
-                <a16:creationId xmlns:a16="http://schemas.microsoft.com/office/drawing/2014/main" id="{DB46F227-AA48-E544-A538-7957BAC1417D}"/>
-              </a:ext>
-            </a:extLst>
-          </p:cNvPr>
-          <p:cNvSpPr txBox="1"/>
-          <p:nvPr/>
-        </p:nvSpPr>
-        <p:spPr>
-          <a:xfrm>
-            <a:off x="92501" y="592057"/>
-            <a:ext cx="4260256" cy="523220"/>
-          </a:xfrm>
-          <a:prstGeom prst="rect">
-            <a:avLst/>
-          </a:prstGeom>
-          <a:noFill/>
-        </p:spPr>
-        <p:txBody>
-          <a:bodyPr wrap="square" rtlCol="0">
-            <a:spAutoFit/>
-          </a:bodyPr>
-          <a:lstStyle/>
-          <a:p>
-            <a:pPr marL="380990" indent="-380990">
-              <a:buFont typeface="Arial" panose="020B0604020202020204" pitchFamily="34" charset="0"/>
-              <a:buChar char="•"/>
-            </a:pPr>
-            <a:r>
-              <a:rPr lang="en-US" sz="1400">
-                <a:hlinkClick r:id="rId2"/>
-              </a:rPr>
-              <a:t>https://www.avax.network</a:t>
-            </a:r>
-            <a:r>
-              <a:rPr lang="en-US" sz="1400"/>
-              <a:t> </a:t>
-            </a:r>
-          </a:p>
-          <a:p>
-            <a:pPr marL="380990" indent="-380990">
-              <a:buFont typeface="Arial" panose="020B0604020202020204" pitchFamily="34" charset="0"/>
-              <a:buChar char="•"/>
-            </a:pPr>
-            <a:r>
-              <a:rPr lang="en-US" sz="1400">
-                <a:hlinkClick r:id="rId3"/>
-              </a:rPr>
-              <a:t>https://www.avalabs.org</a:t>
-            </a:r>
-            <a:endParaRPr lang="en-US" sz="1400"/>
-          </a:p>
-        </p:txBody>
-      </p:sp>
-      <p:pic>
-        <p:nvPicPr>
-          <p:cNvPr id="5" name="Picture 4">
-            <a:extLst>
-              <a:ext uri="{FF2B5EF4-FFF2-40B4-BE49-F238E27FC236}">
-                <a16:creationId xmlns:a16="http://schemas.microsoft.com/office/drawing/2014/main" id="{F135D3C1-174A-3D4B-82BF-5823B05511F8}"/>
-              </a:ext>
-            </a:extLst>
-          </p:cNvPr>
-          <p:cNvPicPr>
-            <a:picLocks noChangeAspect="1"/>
-          </p:cNvPicPr>
-          <p:nvPr/>
-        </p:nvPicPr>
-        <p:blipFill>
-          <a:blip r:embed="rId4" cstate="email">
-            <a:extLst>
-              <a:ext uri="{28A0092B-C50C-407E-A947-70E740481C1C}">
-                <a14:useLocalDpi xmlns:a14="http://schemas.microsoft.com/office/drawing/2010/main"/>
-              </a:ext>
-            </a:extLst>
-          </a:blip>
-          <a:stretch>
-            <a:fillRect/>
-          </a:stretch>
-        </p:blipFill>
-        <p:spPr>
-          <a:xfrm>
-            <a:off x="9396546" y="103829"/>
-            <a:ext cx="2702953" cy="1885393"/>
-          </a:xfrm>
-          <a:prstGeom prst="rect">
-            <a:avLst/>
-          </a:prstGeom>
-        </p:spPr>
-      </p:pic>
-      <p:pic>
-        <p:nvPicPr>
-          <p:cNvPr id="6" name="Picture 5">
-            <a:extLst>
-              <a:ext uri="{FF2B5EF4-FFF2-40B4-BE49-F238E27FC236}">
-                <a16:creationId xmlns:a16="http://schemas.microsoft.com/office/drawing/2014/main" id="{B8655116-F595-F242-8E56-BD173E367BFB}"/>
-              </a:ext>
-            </a:extLst>
-          </p:cNvPr>
-          <p:cNvPicPr>
-            <a:picLocks noChangeAspect="1"/>
-          </p:cNvPicPr>
-          <p:nvPr/>
-        </p:nvPicPr>
-        <p:blipFill>
-          <a:blip r:embed="rId5" cstate="email">
-            <a:extLst>
-              <a:ext uri="{28A0092B-C50C-407E-A947-70E740481C1C}">
-                <a14:useLocalDpi xmlns:a14="http://schemas.microsoft.com/office/drawing/2010/main"/>
-              </a:ext>
-            </a:extLst>
-          </a:blip>
-          <a:stretch>
-            <a:fillRect/>
-          </a:stretch>
-        </p:blipFill>
-        <p:spPr>
-          <a:xfrm>
-            <a:off x="6127427" y="247754"/>
-            <a:ext cx="2303120" cy="899745"/>
-          </a:xfrm>
-          <a:prstGeom prst="rect">
-            <a:avLst/>
-          </a:prstGeom>
-        </p:spPr>
-      </p:pic>
-      <p:pic>
-        <p:nvPicPr>
-          <p:cNvPr id="1030" name="Picture 6" descr="Emin Gün Sirer - Founder @ Ava Labs">
-            <a:extLst>
-              <a:ext uri="{FF2B5EF4-FFF2-40B4-BE49-F238E27FC236}">
-                <a16:creationId xmlns:a16="http://schemas.microsoft.com/office/drawing/2014/main" id="{78DB8FB8-AC9E-4248-94F8-7F9AF8B157B3}"/>
-              </a:ext>
-            </a:extLst>
-          </p:cNvPr>
-          <p:cNvPicPr>
-            <a:picLocks noChangeAspect="1" noChangeArrowheads="1"/>
-          </p:cNvPicPr>
-          <p:nvPr/>
-        </p:nvPicPr>
-        <p:blipFill>
-          <a:blip r:embed="rId6" cstate="email">
-            <a:extLst>
-              <a:ext uri="{28A0092B-C50C-407E-A947-70E740481C1C}">
-                <a14:useLocalDpi xmlns:a14="http://schemas.microsoft.com/office/drawing/2010/main"/>
-              </a:ext>
-            </a:extLst>
-          </a:blip>
-          <a:srcRect/>
-          <a:stretch>
-            <a:fillRect/>
-          </a:stretch>
-        </p:blipFill>
-        <p:spPr bwMode="auto">
-          <a:xfrm>
-            <a:off x="9891373" y="2358190"/>
-            <a:ext cx="1713297" cy="2141621"/>
-          </a:xfrm>
-          <a:prstGeom prst="rect">
-            <a:avLst/>
-          </a:prstGeom>
-          <a:noFill/>
-          <a:extLst>
-            <a:ext uri="{909E8E84-426E-40DD-AFC4-6F175D3DCCD1}">
-              <a14:hiddenFill xmlns:a14="http://schemas.microsoft.com/office/drawing/2010/main">
-                <a:solidFill>
-                  <a:srgbClr val="FFFFFF"/>
-                </a:solidFill>
-              </a14:hiddenFill>
-            </a:ext>
-          </a:extLst>
-        </p:spPr>
-      </p:pic>
-      <p:sp>
-        <p:nvSpPr>
-          <p:cNvPr id="7" name="TextBox 6">
-            <a:extLst>
-              <a:ext uri="{FF2B5EF4-FFF2-40B4-BE49-F238E27FC236}">
-                <a16:creationId xmlns:a16="http://schemas.microsoft.com/office/drawing/2014/main" id="{F0286F1D-4846-1640-98DF-121FC16CEA1B}"/>
-              </a:ext>
-            </a:extLst>
-          </p:cNvPr>
-          <p:cNvSpPr txBox="1"/>
-          <p:nvPr/>
-        </p:nvSpPr>
-        <p:spPr>
-          <a:xfrm>
-            <a:off x="9592989" y="4499811"/>
-            <a:ext cx="2310063" cy="523220"/>
-          </a:xfrm>
-          <a:prstGeom prst="rect">
-            <a:avLst/>
-          </a:prstGeom>
-          <a:noFill/>
-        </p:spPr>
-        <p:txBody>
-          <a:bodyPr wrap="square" rtlCol="0">
-            <a:spAutoFit/>
-          </a:bodyPr>
-          <a:lstStyle/>
-          <a:p>
-            <a:pPr algn="ctr"/>
-            <a:r>
-              <a:rPr lang="en-US" sz="1400"/>
-              <a:t>Emin Gün Sirer</a:t>
-            </a:r>
-          </a:p>
-          <a:p>
-            <a:pPr algn="ctr"/>
-            <a:r>
-              <a:rPr lang="en-US" sz="1400"/>
-              <a:t>Founder @ Ava Labs</a:t>
-            </a:r>
-          </a:p>
-        </p:txBody>
-      </p:sp>
-    </p:spTree>
-    <p:extLst>
-      <p:ext uri="{BB962C8B-B14F-4D97-AF65-F5344CB8AC3E}">
-        <p14:creationId xmlns:p14="http://schemas.microsoft.com/office/powerpoint/2010/main" val="898687112"/>
-      </p:ext>
-    </p:extLst>
-  </p:cSld>
-  <p:clrMapOvr>
-    <a:masterClrMapping/>
-  </p:clrMapOvr>
-</p:sld>
-</file>
-
-<file path=ppt/slides/slide11.xml><?xml version="1.0" encoding="utf-8"?>
-<p:sld xmlns:a="http://schemas.openxmlformats.org/drawingml/2006/main" xmlns:r="http://schemas.openxmlformats.org/officeDocument/2006/relationships" xmlns:p="http://schemas.openxmlformats.org/presentationml/2006/main">
-  <p:cSld>
-    <p:spTree>
-      <p:nvGrpSpPr>
-        <p:cNvPr id="1" name=""/>
-        <p:cNvGrpSpPr/>
-        <p:nvPr/>
-      </p:nvGrpSpPr>
-      <p:grpSpPr>
-        <a:xfrm>
-          <a:off x="0" y="0"/>
-          <a:ext cx="0" cy="0"/>
-          <a:chOff x="0" y="0"/>
-          <a:chExt cx="0" cy="0"/>
-        </a:xfrm>
-      </p:grpSpPr>
-      <p:sp>
-        <p:nvSpPr>
-          <p:cNvPr id="3" name="TextBox 2">
-            <a:extLst>
-              <a:ext uri="{FF2B5EF4-FFF2-40B4-BE49-F238E27FC236}">
-                <a16:creationId xmlns:a16="http://schemas.microsoft.com/office/drawing/2014/main" id="{5C8C8936-664F-7302-594B-D77781E9B064}"/>
-              </a:ext>
-            </a:extLst>
-          </p:cNvPr>
-          <p:cNvSpPr txBox="1"/>
-          <p:nvPr/>
-        </p:nvSpPr>
-        <p:spPr>
-          <a:xfrm>
-            <a:off x="0" y="0"/>
-            <a:ext cx="1551008" cy="523220"/>
-          </a:xfrm>
-          <a:prstGeom prst="rect">
-            <a:avLst/>
-          </a:prstGeom>
-          <a:noFill/>
-        </p:spPr>
-        <p:txBody>
-          <a:bodyPr wrap="square" rtlCol="0">
-            <a:spAutoFit/>
-          </a:bodyPr>
-          <a:lstStyle/>
-          <a:p>
-            <a:r>
-              <a:rPr lang="en-US" sz="2800" b="1"/>
-              <a:t>Helium</a:t>
-            </a:r>
-          </a:p>
-        </p:txBody>
-      </p:sp>
-      <p:pic>
-        <p:nvPicPr>
-          <p:cNvPr id="5" name="Picture 4">
-            <a:extLst>
-              <a:ext uri="{FF2B5EF4-FFF2-40B4-BE49-F238E27FC236}">
-                <a16:creationId xmlns:a16="http://schemas.microsoft.com/office/drawing/2014/main" id="{98004987-FD7F-44C7-5E3E-0D398237B49C}"/>
-              </a:ext>
-            </a:extLst>
-          </p:cNvPr>
-          <p:cNvPicPr>
-            <a:picLocks noChangeAspect="1"/>
-          </p:cNvPicPr>
-          <p:nvPr/>
-        </p:nvPicPr>
-        <p:blipFill>
-          <a:blip r:embed="rId2" cstate="email">
-            <a:extLst>
-              <a:ext uri="{28A0092B-C50C-407E-A947-70E740481C1C}">
-                <a14:useLocalDpi xmlns:a14="http://schemas.microsoft.com/office/drawing/2010/main"/>
-              </a:ext>
-            </a:extLst>
-          </a:blip>
-          <a:stretch>
-            <a:fillRect/>
-          </a:stretch>
-        </p:blipFill>
-        <p:spPr>
-          <a:xfrm>
-            <a:off x="8748816" y="0"/>
-            <a:ext cx="3443184" cy="1192192"/>
-          </a:xfrm>
-          <a:prstGeom prst="rect">
-            <a:avLst/>
-          </a:prstGeom>
-        </p:spPr>
-      </p:pic>
-      <p:sp>
-        <p:nvSpPr>
-          <p:cNvPr id="6" name="TextBox 5">
-            <a:extLst>
-              <a:ext uri="{FF2B5EF4-FFF2-40B4-BE49-F238E27FC236}">
-                <a16:creationId xmlns:a16="http://schemas.microsoft.com/office/drawing/2014/main" id="{2DD6779D-B1E5-D965-3C21-C149B9403733}"/>
-              </a:ext>
-            </a:extLst>
-          </p:cNvPr>
-          <p:cNvSpPr txBox="1"/>
-          <p:nvPr/>
-        </p:nvSpPr>
-        <p:spPr>
-          <a:xfrm>
-            <a:off x="247749" y="846559"/>
-            <a:ext cx="6007260" cy="4616648"/>
-          </a:xfrm>
-          <a:prstGeom prst="rect">
-            <a:avLst/>
-          </a:prstGeom>
-          <a:noFill/>
-        </p:spPr>
-        <p:txBody>
-          <a:bodyPr wrap="square" rtlCol="0">
-            <a:spAutoFit/>
-          </a:bodyPr>
-          <a:lstStyle/>
-          <a:p>
-            <a:pPr marL="285750" indent="-285750">
-              <a:buFont typeface="Arial" panose="020B0604020202020204" pitchFamily="34" charset="0"/>
-              <a:buChar char="•"/>
-            </a:pPr>
-            <a:r>
-              <a:rPr lang="en-US" sz="1400" b="1">
-                <a:solidFill>
-                  <a:srgbClr val="FF0000"/>
-                </a:solidFill>
-              </a:rPr>
-              <a:t>Helium</a:t>
-            </a:r>
-            <a:r>
-              <a:rPr lang="en-US" sz="1400"/>
-              <a:t> provides low-cost connectivity for IoT devices (much cheaper than WiFi). Individuals can install Helium routers or, "hot spots," at their homes or offices and earn </a:t>
-            </a:r>
-            <a:r>
-              <a:rPr lang="en-US" sz="1400" b="1">
-                <a:solidFill>
-                  <a:srgbClr val="FF0000"/>
-                </a:solidFill>
-              </a:rPr>
-              <a:t>HNT</a:t>
-            </a:r>
-            <a:r>
-              <a:rPr lang="en-US" sz="1400"/>
-              <a:t> (crypto token) for providing connectivity.</a:t>
-            </a:r>
-          </a:p>
-          <a:p>
-            <a:pPr marL="285750" indent="-285750">
-              <a:buFont typeface="Arial" panose="020B0604020202020204" pitchFamily="34" charset="0"/>
-              <a:buChar char="•"/>
-            </a:pPr>
-            <a:r>
-              <a:rPr lang="en-US" sz="1400" b="1">
-                <a:solidFill>
-                  <a:srgbClr val="FF0000"/>
-                </a:solidFill>
-              </a:rPr>
-              <a:t>HNT</a:t>
-            </a:r>
-            <a:r>
-              <a:rPr lang="en-US" sz="1400"/>
-              <a:t> token - the 46th-largest cryptocurrency by market cap (~3 Bln)</a:t>
-            </a:r>
-          </a:p>
-          <a:p>
-            <a:pPr marL="285750" indent="-285750">
-              <a:buFont typeface="Arial" panose="020B0604020202020204" pitchFamily="34" charset="0"/>
-              <a:buChar char="•"/>
-            </a:pPr>
-            <a:r>
-              <a:rPr lang="en-US" sz="1400"/>
-              <a:t>Helium Inc. was founded in 2013 in San Francisco, CA. It specializes in IoT, blockchain technology development, routers and networks</a:t>
-            </a:r>
-          </a:p>
-          <a:p>
-            <a:pPr marL="285750" indent="-285750">
-              <a:buFont typeface="Arial" panose="020B0604020202020204" pitchFamily="34" charset="0"/>
-              <a:buChar char="•"/>
-            </a:pPr>
-            <a:r>
-              <a:rPr lang="en-US" sz="1400"/>
-              <a:t>The </a:t>
-            </a:r>
-            <a:r>
-              <a:rPr lang="en-US" sz="1400" b="1">
-                <a:solidFill>
-                  <a:srgbClr val="FF0000"/>
-                </a:solidFill>
-              </a:rPr>
-              <a:t>Helium</a:t>
-            </a:r>
-            <a:r>
-              <a:rPr lang="en-US" sz="1400"/>
-              <a:t> hot spots provide a long-range form of WiFi called </a:t>
-            </a:r>
-            <a:r>
-              <a:rPr lang="en-US" sz="1400" b="1">
-                <a:solidFill>
-                  <a:srgbClr val="FF0000"/>
-                </a:solidFill>
-              </a:rPr>
-              <a:t>LongFi</a:t>
-            </a:r>
-            <a:r>
-              <a:rPr lang="en-US" sz="1400"/>
-              <a:t> that reportedly reaches 200 times farther than a traditional WiFi hot spot, or as much as 10 miles depending on environmental conditions.</a:t>
-            </a:r>
-          </a:p>
-          <a:p>
-            <a:pPr marL="285750" indent="-285750">
-              <a:buFont typeface="Arial" panose="020B0604020202020204" pitchFamily="34" charset="0"/>
-              <a:buChar char="•"/>
-            </a:pPr>
-            <a:r>
-              <a:rPr lang="en-US" sz="1400"/>
-              <a:t>In October 2021, DISH Network said it was partnering with Helium to "support open source and low-cost wireless connectivity ecosystems" and utilizing Helium to roll out 5G . The city of San Jose, California, became the first city to officially join the Helium network and will use Helium to provide internet access for low-income residents. </a:t>
-            </a:r>
-          </a:p>
-          <a:p>
-            <a:pPr marL="285750" indent="-285750">
-              <a:buFont typeface="Arial" panose="020B0604020202020204" pitchFamily="34" charset="0"/>
-              <a:buChar char="•"/>
-            </a:pPr>
-            <a:r>
-              <a:rPr lang="en-US" sz="1400" b="1">
-                <a:solidFill>
-                  <a:srgbClr val="FF0000"/>
-                </a:solidFill>
-              </a:rPr>
-              <a:t>Helium</a:t>
-            </a:r>
-            <a:r>
-              <a:rPr lang="en-US" sz="1400"/>
-              <a:t> is energy efficient. It uses "proof of coverage consensus" (essentially verifying that routers are located where they claim and that they are running and providing coverage). It uses much less energy: about five watts to run, or the equivalent of having an LED light bulb on.</a:t>
-            </a:r>
-          </a:p>
-          <a:p>
-            <a:pPr marL="285750" indent="-285750">
-              <a:buFont typeface="Arial" panose="020B0604020202020204" pitchFamily="34" charset="0"/>
-              <a:buChar char="•"/>
-            </a:pPr>
-            <a:r>
-              <a:rPr lang="en-US" sz="1400"/>
-              <a:t>One big risk – ISPs (internet service providers) may prohibit their customers from using </a:t>
-            </a:r>
-            <a:r>
-              <a:rPr lang="en-US" sz="1400" b="1">
-                <a:solidFill>
-                  <a:srgbClr val="FF0000"/>
-                </a:solidFill>
-              </a:rPr>
-              <a:t>Helium</a:t>
-            </a:r>
-            <a:r>
-              <a:rPr lang="en-US" sz="1400"/>
-              <a:t> hot spots because reselling their bandwidth could violate their terms of service.</a:t>
-            </a:r>
-          </a:p>
-        </p:txBody>
-      </p:sp>
-      <p:pic>
-        <p:nvPicPr>
-          <p:cNvPr id="7" name="Picture 6">
-            <a:extLst>
-              <a:ext uri="{FF2B5EF4-FFF2-40B4-BE49-F238E27FC236}">
-                <a16:creationId xmlns:a16="http://schemas.microsoft.com/office/drawing/2014/main" id="{48ADC555-D9FA-A135-90BE-028219B44351}"/>
-              </a:ext>
-            </a:extLst>
-          </p:cNvPr>
-          <p:cNvPicPr>
-            <a:picLocks noChangeAspect="1"/>
-          </p:cNvPicPr>
-          <p:nvPr/>
-        </p:nvPicPr>
-        <p:blipFill>
-          <a:blip r:embed="rId3" cstate="email">
-            <a:extLst>
-              <a:ext uri="{28A0092B-C50C-407E-A947-70E740481C1C}">
-                <a14:useLocalDpi xmlns:a14="http://schemas.microsoft.com/office/drawing/2010/main"/>
-              </a:ext>
-            </a:extLst>
-          </a:blip>
-          <a:stretch>
-            <a:fillRect/>
-          </a:stretch>
-        </p:blipFill>
-        <p:spPr>
-          <a:xfrm>
-            <a:off x="10267313" y="1533699"/>
-            <a:ext cx="1466847" cy="1629137"/>
-          </a:xfrm>
-          <a:prstGeom prst="rect">
-            <a:avLst/>
-          </a:prstGeom>
-        </p:spPr>
-      </p:pic>
-      <p:pic>
-        <p:nvPicPr>
-          <p:cNvPr id="8" name="Picture 7">
-            <a:extLst>
-              <a:ext uri="{FF2B5EF4-FFF2-40B4-BE49-F238E27FC236}">
-                <a16:creationId xmlns:a16="http://schemas.microsoft.com/office/drawing/2014/main" id="{F220B1AD-5E78-D480-2B67-8D7ACEBC08F2}"/>
-              </a:ext>
-            </a:extLst>
-          </p:cNvPr>
-          <p:cNvPicPr>
-            <a:picLocks noChangeAspect="1"/>
-          </p:cNvPicPr>
-          <p:nvPr/>
-        </p:nvPicPr>
-        <p:blipFill>
-          <a:blip r:embed="rId4" cstate="email">
-            <a:extLst>
-              <a:ext uri="{28A0092B-C50C-407E-A947-70E740481C1C}">
-                <a14:useLocalDpi xmlns:a14="http://schemas.microsoft.com/office/drawing/2010/main"/>
-              </a:ext>
-            </a:extLst>
-          </a:blip>
-          <a:stretch>
-            <a:fillRect/>
-          </a:stretch>
-        </p:blipFill>
-        <p:spPr>
-          <a:xfrm>
-            <a:off x="6964466" y="1293707"/>
-            <a:ext cx="1784350" cy="1295400"/>
-          </a:xfrm>
-          <a:prstGeom prst="rect">
-            <a:avLst/>
-          </a:prstGeom>
-        </p:spPr>
-      </p:pic>
-      <p:pic>
-        <p:nvPicPr>
-          <p:cNvPr id="9" name="Picture 8">
-            <a:extLst>
-              <a:ext uri="{FF2B5EF4-FFF2-40B4-BE49-F238E27FC236}">
-                <a16:creationId xmlns:a16="http://schemas.microsoft.com/office/drawing/2014/main" id="{6FC97D1D-E050-D880-BF9A-76B1AED51E16}"/>
-              </a:ext>
-            </a:extLst>
-          </p:cNvPr>
-          <p:cNvPicPr>
-            <a:picLocks noChangeAspect="1"/>
-          </p:cNvPicPr>
-          <p:nvPr/>
-        </p:nvPicPr>
-        <p:blipFill>
-          <a:blip r:embed="rId5" cstate="email">
-            <a:extLst>
-              <a:ext uri="{28A0092B-C50C-407E-A947-70E740481C1C}">
-                <a14:useLocalDpi xmlns:a14="http://schemas.microsoft.com/office/drawing/2010/main"/>
-              </a:ext>
-            </a:extLst>
-          </a:blip>
-          <a:stretch>
-            <a:fillRect/>
-          </a:stretch>
-        </p:blipFill>
-        <p:spPr>
-          <a:xfrm>
-            <a:off x="9556145" y="3429000"/>
-            <a:ext cx="1828525" cy="1295400"/>
-          </a:xfrm>
-          <a:prstGeom prst="rect">
-            <a:avLst/>
-          </a:prstGeom>
-        </p:spPr>
-      </p:pic>
-      <p:pic>
-        <p:nvPicPr>
-          <p:cNvPr id="10" name="Picture 9">
-            <a:extLst>
-              <a:ext uri="{FF2B5EF4-FFF2-40B4-BE49-F238E27FC236}">
-                <a16:creationId xmlns:a16="http://schemas.microsoft.com/office/drawing/2014/main" id="{A474ACC6-5CC5-A730-7B36-877288F65F99}"/>
-              </a:ext>
-            </a:extLst>
-          </p:cNvPr>
-          <p:cNvPicPr>
-            <a:picLocks noChangeAspect="1"/>
-          </p:cNvPicPr>
-          <p:nvPr/>
-        </p:nvPicPr>
-        <p:blipFill>
-          <a:blip r:embed="rId6" cstate="email">
-            <a:extLst>
-              <a:ext uri="{28A0092B-C50C-407E-A947-70E740481C1C}">
-                <a14:useLocalDpi xmlns:a14="http://schemas.microsoft.com/office/drawing/2010/main"/>
-              </a:ext>
-            </a:extLst>
-          </a:blip>
-          <a:stretch>
-            <a:fillRect/>
-          </a:stretch>
-        </p:blipFill>
-        <p:spPr>
-          <a:xfrm>
-            <a:off x="7773506" y="2888301"/>
-            <a:ext cx="1373098" cy="1347352"/>
-          </a:xfrm>
-          <a:prstGeom prst="rect">
-            <a:avLst/>
-          </a:prstGeom>
-        </p:spPr>
-      </p:pic>
-      <p:pic>
-        <p:nvPicPr>
-          <p:cNvPr id="11" name="Picture 10">
-            <a:extLst>
-              <a:ext uri="{FF2B5EF4-FFF2-40B4-BE49-F238E27FC236}">
-                <a16:creationId xmlns:a16="http://schemas.microsoft.com/office/drawing/2014/main" id="{201DBCFD-FD5B-D82C-FC07-1F9F0E48A95E}"/>
-              </a:ext>
-            </a:extLst>
-          </p:cNvPr>
-          <p:cNvPicPr>
-            <a:picLocks noChangeAspect="1"/>
-          </p:cNvPicPr>
-          <p:nvPr/>
-        </p:nvPicPr>
-        <p:blipFill>
-          <a:blip r:embed="rId7" cstate="email">
-            <a:extLst>
-              <a:ext uri="{28A0092B-C50C-407E-A947-70E740481C1C}">
-                <a14:useLocalDpi xmlns:a14="http://schemas.microsoft.com/office/drawing/2010/main"/>
-              </a:ext>
-            </a:extLst>
-          </a:blip>
-          <a:stretch>
-            <a:fillRect/>
-          </a:stretch>
-        </p:blipFill>
-        <p:spPr>
-          <a:xfrm>
-            <a:off x="7379493" y="4534508"/>
-            <a:ext cx="1486811" cy="2016763"/>
-          </a:xfrm>
-          <a:prstGeom prst="rect">
-            <a:avLst/>
-          </a:prstGeom>
-        </p:spPr>
-      </p:pic>
-    </p:spTree>
-    <p:extLst>
-      <p:ext uri="{BB962C8B-B14F-4D97-AF65-F5344CB8AC3E}">
-        <p14:creationId xmlns:p14="http://schemas.microsoft.com/office/powerpoint/2010/main" val="875803744"/>
-      </p:ext>
-    </p:extLst>
-  </p:cSld>
-  <p:clrMapOvr>
-    <a:masterClrMapping/>
-  </p:clrMapOvr>
-</p:sld>
-</file>
-
-<file path=ppt/slides/slide12.xml><?xml version="1.0" encoding="utf-8"?>
 <p:sld xmlns:a="http://schemas.openxmlformats.org/drawingml/2006/main" xmlns:r="http://schemas.openxmlformats.org/officeDocument/2006/relationships" xmlns:p="http://schemas.openxmlformats.org/presentationml/2006/main">
   <p:cSld>
     <p:spTree>
@@ -4872,7 +3885,7 @@
 </p:sld>
 </file>
 
-<file path=ppt/slides/slide13.xml><?xml version="1.0" encoding="utf-8"?>
+<file path=ppt/slides/slide11.xml><?xml version="1.0" encoding="utf-8"?>
 <p:sld xmlns:a="http://schemas.openxmlformats.org/drawingml/2006/main" xmlns:r="http://schemas.openxmlformats.org/officeDocument/2006/relationships" xmlns:p="http://schemas.openxmlformats.org/presentationml/2006/main">
   <p:cSld>
     <p:spTree>
@@ -5212,7 +4225,7 @@
 </p:sld>
 </file>
 
-<file path=ppt/slides/slide14.xml><?xml version="1.0" encoding="utf-8"?>
+<file path=ppt/slides/slide12.xml><?xml version="1.0" encoding="utf-8"?>
 <p:sld xmlns:a="http://schemas.openxmlformats.org/drawingml/2006/main" xmlns:r="http://schemas.openxmlformats.org/officeDocument/2006/relationships" xmlns:p="http://schemas.openxmlformats.org/presentationml/2006/main">
   <p:cSld>
     <p:spTree>
@@ -8294,470 +7307,6 @@
           <p:cNvPr id="2" name="TextBox 1">
             <a:extLst>
               <a:ext uri="{FF2B5EF4-FFF2-40B4-BE49-F238E27FC236}">
-                <a16:creationId xmlns:a16="http://schemas.microsoft.com/office/drawing/2014/main" id="{0DE4D131-7508-F647-A392-A18116EF40E4}"/>
-              </a:ext>
-            </a:extLst>
-          </p:cNvPr>
-          <p:cNvSpPr txBox="1"/>
-          <p:nvPr/>
-        </p:nvSpPr>
-        <p:spPr>
-          <a:xfrm>
-            <a:off x="1" y="508647"/>
-            <a:ext cx="4490519" cy="307777"/>
-          </a:xfrm>
-          <a:prstGeom prst="rect">
-            <a:avLst/>
-          </a:prstGeom>
-          <a:noFill/>
-        </p:spPr>
-        <p:txBody>
-          <a:bodyPr wrap="square" rtlCol="0">
-            <a:spAutoFit/>
-          </a:bodyPr>
-          <a:lstStyle/>
-          <a:p>
-            <a:r>
-              <a:rPr lang="en-US" sz="1400">
-                <a:hlinkClick r:id="rId2"/>
-              </a:rPr>
-              <a:t>https://en.wikipedia.org/wiki/Lightning_Network</a:t>
-            </a:r>
-            <a:endParaRPr lang="en-US" sz="1400"/>
-          </a:p>
-        </p:txBody>
-      </p:sp>
-      <p:sp>
-        <p:nvSpPr>
-          <p:cNvPr id="3" name="TextBox 2">
-            <a:extLst>
-              <a:ext uri="{FF2B5EF4-FFF2-40B4-BE49-F238E27FC236}">
-                <a16:creationId xmlns:a16="http://schemas.microsoft.com/office/drawing/2014/main" id="{DB796AE3-BE62-1A46-A8CB-DB50C13DC99A}"/>
-              </a:ext>
-            </a:extLst>
-          </p:cNvPr>
-          <p:cNvSpPr txBox="1"/>
-          <p:nvPr/>
-        </p:nvSpPr>
-        <p:spPr>
-          <a:xfrm>
-            <a:off x="2" y="-4313"/>
-            <a:ext cx="3159888" cy="523220"/>
-          </a:xfrm>
-          <a:prstGeom prst="rect">
-            <a:avLst/>
-          </a:prstGeom>
-          <a:noFill/>
-        </p:spPr>
-        <p:txBody>
-          <a:bodyPr wrap="square" rtlCol="0">
-            <a:spAutoFit/>
-          </a:bodyPr>
-          <a:lstStyle/>
-          <a:p>
-            <a:r>
-              <a:rPr lang="en-US" sz="2800" b="1"/>
-              <a:t>Lightning Network</a:t>
-            </a:r>
-          </a:p>
-        </p:txBody>
-      </p:sp>
-      <p:sp>
-        <p:nvSpPr>
-          <p:cNvPr id="5" name="TextBox 4">
-            <a:extLst>
-              <a:ext uri="{FF2B5EF4-FFF2-40B4-BE49-F238E27FC236}">
-                <a16:creationId xmlns:a16="http://schemas.microsoft.com/office/drawing/2014/main" id="{32FFDCD7-CF6C-9140-B888-87776FBFBA83}"/>
-              </a:ext>
-            </a:extLst>
-          </p:cNvPr>
-          <p:cNvSpPr txBox="1"/>
-          <p:nvPr/>
-        </p:nvSpPr>
-        <p:spPr>
-          <a:xfrm>
-            <a:off x="104745" y="1273954"/>
-            <a:ext cx="7761837" cy="2893100"/>
-          </a:xfrm>
-          <a:prstGeom prst="rect">
-            <a:avLst/>
-          </a:prstGeom>
-          <a:noFill/>
-        </p:spPr>
-        <p:txBody>
-          <a:bodyPr wrap="square" rtlCol="0">
-            <a:spAutoFit/>
-          </a:bodyPr>
-          <a:lstStyle/>
-          <a:p>
-            <a:r>
-              <a:rPr lang="en-US" sz="1400"/>
-              <a:t>The Lightning Network (LN) is a "layer 2" payment protocol layered on top of a blockchain-based cryptocurrency such as </a:t>
-            </a:r>
-            <a:r>
-              <a:rPr lang="en-US" sz="1400" b="1">
-                <a:solidFill>
-                  <a:srgbClr val="00B050"/>
-                </a:solidFill>
-              </a:rPr>
-              <a:t>bitcoin</a:t>
-            </a:r>
-            <a:r>
-              <a:rPr lang="en-US" sz="1400"/>
-              <a:t> or </a:t>
-            </a:r>
-            <a:r>
-              <a:rPr lang="en-US" sz="1400" b="1">
-                <a:solidFill>
-                  <a:srgbClr val="00B050"/>
-                </a:solidFill>
-              </a:rPr>
-              <a:t>litecoin</a:t>
-            </a:r>
-            <a:r>
-              <a:rPr lang="en-US" sz="1400"/>
-              <a:t>. </a:t>
-            </a:r>
-          </a:p>
-          <a:p>
-            <a:endParaRPr lang="en-US" sz="1400"/>
-          </a:p>
-          <a:p>
-            <a:r>
-              <a:rPr lang="en-US" sz="1400"/>
-              <a:t>It is intended to enable fast transactions among participating nodes and has been proposed as a solution to the bitcoin scalability problem</a:t>
-            </a:r>
-          </a:p>
-          <a:p>
-            <a:endParaRPr lang="en-US" sz="1400"/>
-          </a:p>
-          <a:p>
-            <a:r>
-              <a:rPr lang="en-US" sz="1400"/>
-              <a:t>Cryptocurrency exchanges such as </a:t>
-            </a:r>
-            <a:r>
-              <a:rPr lang="en-US" sz="1400" b="1">
-                <a:solidFill>
-                  <a:srgbClr val="00B050"/>
-                </a:solidFill>
-              </a:rPr>
-              <a:t>Bitfinex</a:t>
-            </a:r>
-            <a:r>
-              <a:rPr lang="en-US" sz="1400"/>
-              <a:t> use Lightning Network to enable deposits and withdrawals.</a:t>
-            </a:r>
-          </a:p>
-          <a:p>
-            <a:endParaRPr lang="en-US" sz="1400"/>
-          </a:p>
-          <a:p>
-            <a:r>
-              <a:rPr lang="en-US" sz="1400" b="1">
-                <a:solidFill>
-                  <a:srgbClr val="00B050"/>
-                </a:solidFill>
-              </a:rPr>
-              <a:t>Laszlo Hanyecz</a:t>
-            </a:r>
-            <a:r>
-              <a:rPr lang="en-US" sz="1400"/>
-              <a:t>, who gained fame in the cryptocurrency community for paying </a:t>
-            </a:r>
-            <a:r>
-              <a:rPr lang="en-US" sz="1400" b="1">
-                <a:solidFill>
-                  <a:srgbClr val="FF0000"/>
-                </a:solidFill>
-              </a:rPr>
-              <a:t>10,000 BTC</a:t>
-            </a:r>
-            <a:r>
-              <a:rPr lang="en-US" sz="1400"/>
-              <a:t> for two pizzas in 2010, bought two more pizzas in 2018 using Lightning Network and paid </a:t>
-            </a:r>
-            <a:r>
-              <a:rPr lang="en-US" sz="1400" b="1">
-                <a:solidFill>
-                  <a:srgbClr val="FF0000"/>
-                </a:solidFill>
-              </a:rPr>
-              <a:t>0.00649 BTC</a:t>
-            </a:r>
-            <a:r>
-              <a:rPr lang="en-US" sz="1400"/>
-              <a:t>.</a:t>
-            </a:r>
-          </a:p>
-          <a:p>
-            <a:endParaRPr lang="en-US" sz="1400"/>
-          </a:p>
-          <a:p>
-            <a:r>
-              <a:rPr lang="en-US" sz="1400"/>
-              <a:t>Zion (The Bitcoin Social Network) utilizes the Lightning Network running LND (LN Daemon) to send content peer-to-peer through channels.</a:t>
-            </a:r>
-          </a:p>
-        </p:txBody>
-      </p:sp>
-      <p:pic>
-        <p:nvPicPr>
-          <p:cNvPr id="6" name="Picture 5">
-            <a:extLst>
-              <a:ext uri="{FF2B5EF4-FFF2-40B4-BE49-F238E27FC236}">
-                <a16:creationId xmlns:a16="http://schemas.microsoft.com/office/drawing/2014/main" id="{A4B0B57F-5F21-C74C-AA63-39E97B09964E}"/>
-              </a:ext>
-            </a:extLst>
-          </p:cNvPr>
-          <p:cNvPicPr>
-            <a:picLocks noChangeAspect="1"/>
-          </p:cNvPicPr>
-          <p:nvPr/>
-        </p:nvPicPr>
-        <p:blipFill>
-          <a:blip r:embed="rId3" cstate="email">
-            <a:extLst>
-              <a:ext uri="{28A0092B-C50C-407E-A947-70E740481C1C}">
-                <a14:useLocalDpi xmlns:a14="http://schemas.microsoft.com/office/drawing/2010/main"/>
-              </a:ext>
-            </a:extLst>
-          </a:blip>
-          <a:stretch>
-            <a:fillRect/>
-          </a:stretch>
-        </p:blipFill>
-        <p:spPr>
-          <a:xfrm>
-            <a:off x="9600901" y="674711"/>
-            <a:ext cx="2026635" cy="2228149"/>
-          </a:xfrm>
-          <a:prstGeom prst="rect">
-            <a:avLst/>
-          </a:prstGeom>
-        </p:spPr>
-      </p:pic>
-      <p:pic>
-        <p:nvPicPr>
-          <p:cNvPr id="1028" name="Picture 4" descr="10 Years On, Laszlo Hanyecz Has No Regrets About His $45M Bitcoin Pizzas -  CoinDesk">
-            <a:extLst>
-              <a:ext uri="{FF2B5EF4-FFF2-40B4-BE49-F238E27FC236}">
-                <a16:creationId xmlns:a16="http://schemas.microsoft.com/office/drawing/2014/main" id="{99ACE604-8E98-B64B-8769-A09521AA71E7}"/>
-              </a:ext>
-            </a:extLst>
-          </p:cNvPr>
-          <p:cNvPicPr>
-            <a:picLocks noChangeAspect="1" noChangeArrowheads="1"/>
-          </p:cNvPicPr>
-          <p:nvPr/>
-        </p:nvPicPr>
-        <p:blipFill rotWithShape="1">
-          <a:blip r:embed="rId4" cstate="email">
-            <a:extLst>
-              <a:ext uri="{28A0092B-C50C-407E-A947-70E740481C1C}">
-                <a14:useLocalDpi xmlns:a14="http://schemas.microsoft.com/office/drawing/2010/main"/>
-              </a:ext>
-            </a:extLst>
-          </a:blip>
-          <a:srcRect/>
-          <a:stretch/>
-        </p:blipFill>
-        <p:spPr bwMode="auto">
-          <a:xfrm>
-            <a:off x="9600899" y="3493381"/>
-            <a:ext cx="2026636" cy="1621953"/>
-          </a:xfrm>
-          <a:prstGeom prst="rect">
-            <a:avLst/>
-          </a:prstGeom>
-          <a:noFill/>
-          <a:extLst>
-            <a:ext uri="{909E8E84-426E-40DD-AFC4-6F175D3DCCD1}">
-              <a14:hiddenFill xmlns:a14="http://schemas.microsoft.com/office/drawing/2010/main">
-                <a:solidFill>
-                  <a:srgbClr val="FFFFFF"/>
-                </a:solidFill>
-              </a14:hiddenFill>
-            </a:ext>
-          </a:extLst>
-        </p:spPr>
-      </p:pic>
-      <p:sp>
-        <p:nvSpPr>
-          <p:cNvPr id="7" name="TextBox 6">
-            <a:extLst>
-              <a:ext uri="{FF2B5EF4-FFF2-40B4-BE49-F238E27FC236}">
-                <a16:creationId xmlns:a16="http://schemas.microsoft.com/office/drawing/2014/main" id="{E43F2D1B-1755-C64C-AC38-5A8A78F14C16}"/>
-              </a:ext>
-            </a:extLst>
-          </p:cNvPr>
-          <p:cNvSpPr txBox="1"/>
-          <p:nvPr/>
-        </p:nvSpPr>
-        <p:spPr>
-          <a:xfrm>
-            <a:off x="9721611" y="2932582"/>
-            <a:ext cx="1798623" cy="307777"/>
-          </a:xfrm>
-          <a:prstGeom prst="rect">
-            <a:avLst/>
-          </a:prstGeom>
-          <a:noFill/>
-        </p:spPr>
-        <p:txBody>
-          <a:bodyPr wrap="square" rtlCol="0">
-            <a:spAutoFit/>
-          </a:bodyPr>
-          <a:lstStyle/>
-          <a:p>
-            <a:pPr algn="ctr"/>
-            <a:r>
-              <a:rPr lang="en-US" sz="1400"/>
-              <a:t>Laszlo Hanyecz</a:t>
-            </a:r>
-          </a:p>
-        </p:txBody>
-      </p:sp>
-      <p:sp>
-        <p:nvSpPr>
-          <p:cNvPr id="8" name="TextBox 7">
-            <a:extLst>
-              <a:ext uri="{FF2B5EF4-FFF2-40B4-BE49-F238E27FC236}">
-                <a16:creationId xmlns:a16="http://schemas.microsoft.com/office/drawing/2014/main" id="{0627D84C-59BA-1C4E-B325-53C56ED86372}"/>
-              </a:ext>
-            </a:extLst>
-          </p:cNvPr>
-          <p:cNvSpPr txBox="1"/>
-          <p:nvPr/>
-        </p:nvSpPr>
-        <p:spPr>
-          <a:xfrm>
-            <a:off x="150471" y="5219618"/>
-            <a:ext cx="7037407" cy="523220"/>
-          </a:xfrm>
-          <a:prstGeom prst="rect">
-            <a:avLst/>
-          </a:prstGeom>
-          <a:noFill/>
-          <a:ln>
-            <a:solidFill>
-              <a:schemeClr val="accent1"/>
-            </a:solidFill>
-          </a:ln>
-        </p:spPr>
-        <p:txBody>
-          <a:bodyPr wrap="square" rtlCol="0">
-            <a:spAutoFit/>
-          </a:bodyPr>
-          <a:lstStyle/>
-          <a:p>
-            <a:r>
-              <a:rPr lang="en-US" sz="1400"/>
-              <a:t>Note about </a:t>
-            </a:r>
-            <a:r>
-              <a:rPr lang="en-US" sz="1400" b="1">
-                <a:solidFill>
-                  <a:srgbClr val="00B050"/>
-                </a:solidFill>
-              </a:rPr>
-              <a:t>Litecoin </a:t>
-            </a:r>
-            <a:r>
-              <a:rPr lang="en-US" sz="1400"/>
-              <a:t>:  Litecoin (2011) is a bitcoin fork (faster block generation, larger max number of coins, different hashing algorithm, etc.) </a:t>
-            </a:r>
-            <a:r>
-              <a:rPr lang="en-US" sz="1400">
-                <a:hlinkClick r:id="rId5"/>
-              </a:rPr>
-              <a:t>https://en.m.wikipedia.org/wiki/Litecoin</a:t>
-            </a:r>
-            <a:endParaRPr lang="en-US" sz="1400"/>
-          </a:p>
-        </p:txBody>
-      </p:sp>
-      <p:sp>
-        <p:nvSpPr>
-          <p:cNvPr id="9" name="Right Arrow 8">
-            <a:extLst>
-              <a:ext uri="{FF2B5EF4-FFF2-40B4-BE49-F238E27FC236}">
-                <a16:creationId xmlns:a16="http://schemas.microsoft.com/office/drawing/2014/main" id="{22AF8C81-FFD1-5046-883E-D70FEB14AAE1}"/>
-              </a:ext>
-            </a:extLst>
-          </p:cNvPr>
-          <p:cNvSpPr/>
-          <p:nvPr/>
-        </p:nvSpPr>
-        <p:spPr>
-          <a:xfrm rot="20262202">
-            <a:off x="8126089" y="2938589"/>
-            <a:ext cx="1110559" cy="398353"/>
-          </a:xfrm>
-          <a:prstGeom prst="rightArrow">
-            <a:avLst/>
-          </a:prstGeom>
-        </p:spPr>
-        <p:style>
-          <a:lnRef idx="2">
-            <a:schemeClr val="accent1">
-              <a:shade val="50000"/>
-            </a:schemeClr>
-          </a:lnRef>
-          <a:fillRef idx="1">
-            <a:schemeClr val="accent1"/>
-          </a:fillRef>
-          <a:effectRef idx="0">
-            <a:schemeClr val="accent1"/>
-          </a:effectRef>
-          <a:fontRef idx="minor">
-            <a:schemeClr val="lt1"/>
-          </a:fontRef>
-        </p:style>
-        <p:txBody>
-          <a:bodyPr rtlCol="0" anchor="ctr"/>
-          <a:lstStyle/>
-          <a:p>
-            <a:pPr algn="ctr"/>
-            <a:endParaRPr lang="en-US" sz="3200"/>
-          </a:p>
-        </p:txBody>
-      </p:sp>
-    </p:spTree>
-    <p:extLst>
-      <p:ext uri="{BB962C8B-B14F-4D97-AF65-F5344CB8AC3E}">
-        <p14:creationId xmlns:p14="http://schemas.microsoft.com/office/powerpoint/2010/main" val="3884162676"/>
-      </p:ext>
-    </p:extLst>
-  </p:cSld>
-  <p:clrMapOvr>
-    <a:masterClrMapping/>
-  </p:clrMapOvr>
-</p:sld>
-</file>
-
-<file path=ppt/slides/slide8.xml><?xml version="1.0" encoding="utf-8"?>
-<p:sld xmlns:a="http://schemas.openxmlformats.org/drawingml/2006/main" xmlns:r="http://schemas.openxmlformats.org/officeDocument/2006/relationships" xmlns:p="http://schemas.openxmlformats.org/presentationml/2006/main">
-  <p:cSld>
-    <p:spTree>
-      <p:nvGrpSpPr>
-        <p:cNvPr id="1" name=""/>
-        <p:cNvGrpSpPr/>
-        <p:nvPr/>
-      </p:nvGrpSpPr>
-      <p:grpSpPr>
-        <a:xfrm>
-          <a:off x="0" y="0"/>
-          <a:ext cx="0" cy="0"/>
-          <a:chOff x="0" y="0"/>
-          <a:chExt cx="0" cy="0"/>
-        </a:xfrm>
-      </p:grpSpPr>
-      <p:sp>
-        <p:nvSpPr>
-          <p:cNvPr id="2" name="TextBox 1">
-            <a:extLst>
-              <a:ext uri="{FF2B5EF4-FFF2-40B4-BE49-F238E27FC236}">
                 <a16:creationId xmlns:a16="http://schemas.microsoft.com/office/drawing/2014/main" id="{42DAD29C-2F0E-EC4B-9F5C-7248CF748EC9}"/>
               </a:ext>
             </a:extLst>
@@ -9212,7 +7761,7 @@
 </p:sld>
 </file>
 
-<file path=ppt/slides/slide9.xml><?xml version="1.0" encoding="utf-8"?>
+<file path=ppt/slides/slide8.xml><?xml version="1.0" encoding="utf-8"?>
 <p:sld xmlns:a="http://schemas.openxmlformats.org/drawingml/2006/main" xmlns:r="http://schemas.openxmlformats.org/officeDocument/2006/relationships" xmlns:p="http://schemas.openxmlformats.org/presentationml/2006/main">
   <p:cSld>
     <p:spTree>
@@ -9234,7 +7783,7 @@
           <p:cNvPr id="2" name="TextBox 1">
             <a:extLst>
               <a:ext uri="{FF2B5EF4-FFF2-40B4-BE49-F238E27FC236}">
-                <a16:creationId xmlns:a16="http://schemas.microsoft.com/office/drawing/2014/main" id="{D35DF907-7EBF-7549-8D3E-F5457C861D89}"/>
+                <a16:creationId xmlns:a16="http://schemas.microsoft.com/office/drawing/2014/main" id="{0E12F5A1-E23C-9B4D-8BC3-88AE2CADE412}"/>
               </a:ext>
             </a:extLst>
           </p:cNvPr>
@@ -9243,8 +7792,8 @@
         </p:nvSpPr>
         <p:spPr>
           <a:xfrm>
-            <a:off x="89942" y="89942"/>
-            <a:ext cx="2572235" cy="523220"/>
+            <a:off x="92502" y="1471494"/>
+            <a:ext cx="6551366" cy="3108543"/>
           </a:xfrm>
           <a:prstGeom prst="rect">
             <a:avLst/>
@@ -9257,16 +7806,193 @@
           </a:bodyPr>
           <a:lstStyle/>
           <a:p>
-            <a:r>
-              <a:rPr lang="en-US" sz="2800" b="1"/>
-              <a:t>Tether / USDT</a:t>
-            </a:r>
-            <a:endParaRPr lang="en-US" sz="2800" b="1" i="1">
-              <a:solidFill>
-                <a:srgbClr val="000000"/>
-              </a:solidFill>
-              <a:latin typeface="Helvetica" pitchFamily="2" charset="0"/>
-            </a:endParaRPr>
+            <a:pPr marL="380990" indent="-380990">
+              <a:buFont typeface="Arial" panose="020B0604020202020204" pitchFamily="34" charset="0"/>
+              <a:buChar char="•"/>
+            </a:pPr>
+            <a:r>
+              <a:rPr lang="en-US" sz="1400" b="1">
+                <a:solidFill>
+                  <a:srgbClr val="FF0000"/>
+                </a:solidFill>
+              </a:rPr>
+              <a:t>Avalanche (AVAX)</a:t>
+            </a:r>
+            <a:r>
+              <a:rPr lang="en-US" sz="1400"/>
+              <a:t> – since 2020 - a cryptocurrency and blockchain smart-contracts platform that rivals </a:t>
+            </a:r>
+            <a:r>
+              <a:rPr lang="en-US" sz="1400" b="1">
+                <a:solidFill>
+                  <a:srgbClr val="00B050"/>
+                </a:solidFill>
+              </a:rPr>
+              <a:t>Ethereum</a:t>
+            </a:r>
+            <a:endParaRPr lang="en-US" sz="1400"/>
+          </a:p>
+          <a:p>
+            <a:pPr marL="380990" indent="-380990">
+              <a:buFont typeface="Arial" panose="020B0604020202020204" pitchFamily="34" charset="0"/>
+              <a:buChar char="•"/>
+            </a:pPr>
+            <a:r>
+              <a:rPr lang="en-US" sz="1400" b="1">
+                <a:solidFill>
+                  <a:srgbClr val="FF0000"/>
+                </a:solidFill>
+              </a:rPr>
+              <a:t>Avalanche</a:t>
+            </a:r>
+            <a:r>
+              <a:rPr lang="en-US" sz="1400"/>
+              <a:t> is the fast – 4,500 transactions per second</a:t>
+            </a:r>
+          </a:p>
+          <a:p>
+            <a:pPr marL="380990" indent="-380990">
+              <a:buFont typeface="Arial" panose="020B0604020202020204" pitchFamily="34" charset="0"/>
+              <a:buChar char="•"/>
+            </a:pPr>
+            <a:r>
+              <a:rPr lang="en-US" sz="1400" b="1">
+                <a:solidFill>
+                  <a:srgbClr val="FF0000"/>
+                </a:solidFill>
+              </a:rPr>
+              <a:t>Avalanche</a:t>
+            </a:r>
+            <a:r>
+              <a:rPr lang="en-US" sz="1400"/>
+              <a:t> is open and open-source</a:t>
+            </a:r>
+          </a:p>
+          <a:p>
+            <a:pPr marL="380990" indent="-380990">
+              <a:buFont typeface="Arial" panose="020B0604020202020204" pitchFamily="34" charset="0"/>
+              <a:buChar char="•"/>
+            </a:pPr>
+            <a:r>
+              <a:rPr lang="en-US" sz="1400" b="1">
+                <a:solidFill>
+                  <a:srgbClr val="FF0000"/>
+                </a:solidFill>
+              </a:rPr>
+              <a:t>Avalanche</a:t>
+            </a:r>
+            <a:r>
+              <a:rPr lang="en-US" sz="1400"/>
+              <a:t> is low cost and eco-friendly</a:t>
+            </a:r>
+          </a:p>
+          <a:p>
+            <a:pPr marL="380990" indent="-380990">
+              <a:buFont typeface="Arial" panose="020B0604020202020204" pitchFamily="34" charset="0"/>
+              <a:buChar char="•"/>
+            </a:pPr>
+            <a:r>
+              <a:rPr lang="en-US" sz="1400" b="1">
+                <a:solidFill>
+                  <a:srgbClr val="FF0000"/>
+                </a:solidFill>
+              </a:rPr>
+              <a:t>AVAX</a:t>
+            </a:r>
+            <a:r>
+              <a:rPr lang="en-US" sz="1400"/>
+              <a:t> is the native token of the Avalanche blockchain</a:t>
+            </a:r>
+          </a:p>
+          <a:p>
+            <a:pPr marL="380990" indent="-380990">
+              <a:buFont typeface="Arial" panose="020B0604020202020204" pitchFamily="34" charset="0"/>
+              <a:buChar char="•"/>
+            </a:pPr>
+            <a:r>
+              <a:rPr lang="en-US" sz="1400"/>
+              <a:t>You can </a:t>
+            </a:r>
+            <a:r>
+              <a:rPr lang="en-US" sz="1400" b="1">
+                <a:solidFill>
+                  <a:srgbClr val="00B050"/>
+                </a:solidFill>
+              </a:rPr>
+              <a:t>launch Ethereum dApps</a:t>
+            </a:r>
+            <a:r>
+              <a:rPr lang="en-US" sz="1400"/>
+              <a:t> that confirm transactions instantly and process thousands of transactions per second</a:t>
+            </a:r>
+          </a:p>
+          <a:p>
+            <a:pPr marL="380990" indent="-380990">
+              <a:buFont typeface="Arial" panose="020B0604020202020204" pitchFamily="34" charset="0"/>
+              <a:buChar char="•"/>
+            </a:pPr>
+            <a:r>
+              <a:rPr lang="en-US" sz="1400" b="1">
+                <a:solidFill>
+                  <a:srgbClr val="00B050"/>
+                </a:solidFill>
+              </a:rPr>
+              <a:t>Deploy blockchains</a:t>
+            </a:r>
+            <a:r>
+              <a:rPr lang="en-US" sz="1400"/>
+              <a:t> that fit your own application needs </a:t>
+            </a:r>
+            <a:br>
+              <a:rPr lang="en-US" sz="1400"/>
+            </a:br>
+            <a:r>
+              <a:rPr lang="en-US" sz="1400"/>
+              <a:t>on your own virtual machine</a:t>
+            </a:r>
+          </a:p>
+          <a:p>
+            <a:pPr marL="380990" indent="-380990">
+              <a:buFont typeface="Arial" panose="020B0604020202020204" pitchFamily="34" charset="0"/>
+              <a:buChar char="•"/>
+            </a:pPr>
+            <a:r>
+              <a:rPr lang="en-US" sz="1400" b="1">
+                <a:solidFill>
+                  <a:srgbClr val="00B050"/>
+                </a:solidFill>
+              </a:rPr>
+              <a:t>Deploy subnets</a:t>
+            </a:r>
+            <a:r>
+              <a:rPr lang="en-US" sz="1400"/>
+              <a:t> that allow developers to define rules that can vary from the rule of the Primary Avalanche blockchain</a:t>
+            </a:r>
+          </a:p>
+          <a:p>
+            <a:pPr marL="380990" indent="-380990">
+              <a:buFont typeface="Arial" panose="020B0604020202020204" pitchFamily="34" charset="0"/>
+              <a:buChar char="•"/>
+            </a:pPr>
+            <a:r>
+              <a:rPr lang="en-US" sz="1400" b="1">
+                <a:solidFill>
+                  <a:srgbClr val="00B050"/>
+                </a:solidFill>
+              </a:rPr>
+              <a:t>Stake, or lock up</a:t>
+            </a:r>
+            <a:r>
+              <a:rPr lang="en-US" sz="1400"/>
+              <a:t>, your AVAX to help process transactions </a:t>
+            </a:r>
+            <a:br>
+              <a:rPr lang="en-US" sz="1400"/>
+            </a:br>
+            <a:r>
+              <a:rPr lang="en-US" sz="1400"/>
+              <a:t>and further secure the platform</a:t>
+            </a:r>
           </a:p>
         </p:txBody>
       </p:sp>
@@ -9275,7 +8001,7 @@
           <p:cNvPr id="3" name="TextBox 2">
             <a:extLst>
               <a:ext uri="{FF2B5EF4-FFF2-40B4-BE49-F238E27FC236}">
-                <a16:creationId xmlns:a16="http://schemas.microsoft.com/office/drawing/2014/main" id="{9878BC53-76DB-5840-BF70-8CAA1E071491}"/>
+                <a16:creationId xmlns:a16="http://schemas.microsoft.com/office/drawing/2014/main" id="{8A65183E-31B9-F343-87D9-54036A272EF7}"/>
               </a:ext>
             </a:extLst>
           </p:cNvPr>
@@ -9284,8 +8010,8 @@
         </p:nvSpPr>
         <p:spPr>
           <a:xfrm>
-            <a:off x="89941" y="1179226"/>
-            <a:ext cx="6555699" cy="3539430"/>
+            <a:off x="0" y="1"/>
+            <a:ext cx="2939970" cy="523220"/>
           </a:xfrm>
           <a:prstGeom prst="rect">
             <a:avLst/>
@@ -9298,6 +8024,41 @@
           </a:bodyPr>
           <a:lstStyle/>
           <a:p>
+            <a:r>
+              <a:rPr lang="en-US" sz="2800" b="1"/>
+              <a:t>Avalanche, AVAX</a:t>
+            </a:r>
+          </a:p>
+        </p:txBody>
+      </p:sp>
+      <p:sp>
+        <p:nvSpPr>
+          <p:cNvPr id="4" name="TextBox 3">
+            <a:extLst>
+              <a:ext uri="{FF2B5EF4-FFF2-40B4-BE49-F238E27FC236}">
+                <a16:creationId xmlns:a16="http://schemas.microsoft.com/office/drawing/2014/main" id="{DB46F227-AA48-E544-A538-7957BAC1417D}"/>
+              </a:ext>
+            </a:extLst>
+          </p:cNvPr>
+          <p:cNvSpPr txBox="1"/>
+          <p:nvPr/>
+        </p:nvSpPr>
+        <p:spPr>
+          <a:xfrm>
+            <a:off x="92501" y="592057"/>
+            <a:ext cx="4260256" cy="523220"/>
+          </a:xfrm>
+          <a:prstGeom prst="rect">
+            <a:avLst/>
+          </a:prstGeom>
+          <a:noFill/>
+        </p:spPr>
+        <p:txBody>
+          <a:bodyPr wrap="square" rtlCol="0">
+            <a:spAutoFit/>
+          </a:bodyPr>
+          <a:lstStyle/>
+          <a:p>
             <a:pPr marL="380990" indent="-380990">
               <a:buFont typeface="Arial" panose="020B0604020202020204" pitchFamily="34" charset="0"/>
               <a:buChar char="•"/>
@@ -9306,11 +8067,11 @@
               <a:rPr lang="en-US" sz="1400">
                 <a:hlinkClick r:id="rId2"/>
               </a:rPr>
-              <a:t>https://tether.to</a:t>
-            </a:r>
-            <a:r>
-              <a:rPr lang="en-US" sz="1400"/>
-              <a:t> - </a:t>
+              <a:t>https://www.avax.network</a:t>
+            </a:r>
+            <a:r>
+              <a:rPr lang="en-US" sz="1400"/>
+              <a:t> </a:t>
             </a:r>
           </a:p>
           <a:p>
@@ -9322,170 +8083,18 @@
               <a:rPr lang="en-US" sz="1400">
                 <a:hlinkClick r:id="rId3"/>
               </a:rPr>
-              <a:t>https://en.wikipedia.org/wiki/Tether_(cryptocurrency)</a:t>
-            </a:r>
-            <a:r>
-              <a:rPr lang="en-US" sz="1400"/>
-              <a:t> - </a:t>
-            </a:r>
-          </a:p>
-          <a:p>
-            <a:pPr marL="380990" indent="-380990">
-              <a:buFont typeface="Arial" panose="020B0604020202020204" pitchFamily="34" charset="0"/>
-              <a:buChar char="•"/>
-            </a:pPr>
+              <a:t>https://www.avalabs.org</a:t>
+            </a:r>
             <a:endParaRPr lang="en-US" sz="1400"/>
-          </a:p>
-          <a:p>
-            <a:pPr marL="380990" indent="-380990">
-              <a:buFont typeface="Arial" panose="020B0604020202020204" pitchFamily="34" charset="0"/>
-              <a:buChar char="•"/>
-            </a:pPr>
-            <a:r>
-              <a:rPr lang="en-US" sz="1400" b="1">
-                <a:solidFill>
-                  <a:srgbClr val="FF0000"/>
-                </a:solidFill>
-              </a:rPr>
-              <a:t>Tether</a:t>
-            </a:r>
-            <a:r>
-              <a:rPr lang="en-US" sz="1400"/>
-              <a:t> is often called by its symbol USDT</a:t>
-            </a:r>
-          </a:p>
-          <a:p>
-            <a:endParaRPr lang="en-US" sz="1400"/>
-          </a:p>
-          <a:p>
-            <a:pPr marL="380990" indent="-380990">
-              <a:buFont typeface="Arial" panose="020B0604020202020204" pitchFamily="34" charset="0"/>
-              <a:buChar char="•"/>
-            </a:pPr>
-            <a:r>
-              <a:rPr lang="en-US" sz="1400" b="1">
-                <a:solidFill>
-                  <a:srgbClr val="FF0000"/>
-                </a:solidFill>
-              </a:rPr>
-              <a:t>Tether</a:t>
-            </a:r>
-            <a:r>
-              <a:rPr lang="en-US" sz="1400"/>
-              <a:t> is a cryptocurrency that is hosted on the Ethereum and Bitcoin blockchains, and on other chains</a:t>
-            </a:r>
-          </a:p>
-          <a:p>
-            <a:endParaRPr lang="en-US" sz="1400"/>
-          </a:p>
-          <a:p>
-            <a:pPr marL="380990" indent="-380990">
-              <a:buFont typeface="Arial" panose="020B0604020202020204" pitchFamily="34" charset="0"/>
-              <a:buChar char="•"/>
-            </a:pPr>
-            <a:r>
-              <a:rPr lang="en-US" sz="1400" b="1">
-                <a:solidFill>
-                  <a:srgbClr val="FF0000"/>
-                </a:solidFill>
-              </a:rPr>
-              <a:t>Tether</a:t>
-            </a:r>
-            <a:r>
-              <a:rPr lang="en-US" sz="1400"/>
-              <a:t> tokens are issued by the Hong Kong company </a:t>
-            </a:r>
-            <a:r>
-              <a:rPr lang="en-US" sz="1400" b="1">
-                <a:solidFill>
-                  <a:srgbClr val="00B0F0"/>
-                </a:solidFill>
-              </a:rPr>
-              <a:t>Tether Limited</a:t>
-            </a:r>
-            <a:r>
-              <a:rPr lang="en-US" sz="1400"/>
-              <a:t>, controlled by the owners of </a:t>
-            </a:r>
-            <a:r>
-              <a:rPr lang="en-US" sz="1400" b="1">
-                <a:solidFill>
-                  <a:srgbClr val="00B0F0"/>
-                </a:solidFill>
-              </a:rPr>
-              <a:t>Bitfinex</a:t>
-            </a:r>
-          </a:p>
-          <a:p>
-            <a:endParaRPr lang="en-US" sz="1400"/>
-          </a:p>
-          <a:p>
-            <a:pPr marL="380990" indent="-380990">
-              <a:buFont typeface="Arial" panose="020B0604020202020204" pitchFamily="34" charset="0"/>
-              <a:buChar char="•"/>
-            </a:pPr>
-            <a:r>
-              <a:rPr lang="en-US" sz="1400" b="1">
-                <a:solidFill>
-                  <a:srgbClr val="FF0000"/>
-                </a:solidFill>
-              </a:rPr>
-              <a:t>Tether</a:t>
-            </a:r>
-            <a:r>
-              <a:rPr lang="en-US" sz="1400"/>
-              <a:t> is called a </a:t>
-            </a:r>
-            <a:r>
-              <a:rPr lang="en-US" sz="1400" b="1">
-                <a:solidFill>
-                  <a:srgbClr val="FF0000"/>
-                </a:solidFill>
-              </a:rPr>
-              <a:t>stablecoin</a:t>
-            </a:r>
-            <a:r>
-              <a:rPr lang="en-US" sz="1400"/>
-              <a:t> because it was originally designed to always be worth US $1.00 (and maintaining $1.00 in reserves for each tether issued)</a:t>
-            </a:r>
-          </a:p>
-          <a:p>
-            <a:pPr marL="380990" indent="-380990">
-              <a:buFont typeface="Arial" panose="020B0604020202020204" pitchFamily="34" charset="0"/>
-              <a:buChar char="•"/>
-            </a:pPr>
-            <a:endParaRPr lang="en-US" sz="1400"/>
-          </a:p>
-          <a:p>
-            <a:pPr marL="380990" indent="-380990">
-              <a:buFont typeface="Arial" panose="020B0604020202020204" pitchFamily="34" charset="0"/>
-              <a:buChar char="•"/>
-            </a:pPr>
-            <a:r>
-              <a:rPr lang="en-US" sz="1400"/>
-              <a:t>The word "</a:t>
-            </a:r>
-            <a:r>
-              <a:rPr lang="en-US" sz="1400" b="1">
-                <a:solidFill>
-                  <a:srgbClr val="FF0000"/>
-                </a:solidFill>
-              </a:rPr>
-              <a:t>Tether</a:t>
-            </a:r>
-            <a:r>
-              <a:rPr lang="en-US" sz="1400"/>
-              <a:t>" means a line (as of rope or chain) by which something (an animal) is attached/fastened to restrict its range of movement</a:t>
-            </a:r>
           </a:p>
         </p:txBody>
       </p:sp>
       <p:pic>
         <p:nvPicPr>
-          <p:cNvPr id="9" name="Picture 8">
+          <p:cNvPr id="5" name="Picture 4">
             <a:extLst>
               <a:ext uri="{FF2B5EF4-FFF2-40B4-BE49-F238E27FC236}">
-                <a16:creationId xmlns:a16="http://schemas.microsoft.com/office/drawing/2014/main" id="{E272A16A-AC8A-FF4A-8C36-87810EF4B109}"/>
+                <a16:creationId xmlns:a16="http://schemas.microsoft.com/office/drawing/2014/main" id="{F135D3C1-174A-3D4B-82BF-5823B05511F8}"/>
               </a:ext>
             </a:extLst>
           </p:cNvPr>
@@ -9508,8 +8117,586 @@
         </p:blipFill>
         <p:spPr>
           <a:xfrm>
-            <a:off x="7352735" y="244725"/>
-            <a:ext cx="4601643" cy="1084403"/>
+            <a:off x="9396546" y="103829"/>
+            <a:ext cx="2702953" cy="1885393"/>
+          </a:xfrm>
+          <a:prstGeom prst="rect">
+            <a:avLst/>
+          </a:prstGeom>
+        </p:spPr>
+      </p:pic>
+      <p:pic>
+        <p:nvPicPr>
+          <p:cNvPr id="6" name="Picture 5">
+            <a:extLst>
+              <a:ext uri="{FF2B5EF4-FFF2-40B4-BE49-F238E27FC236}">
+                <a16:creationId xmlns:a16="http://schemas.microsoft.com/office/drawing/2014/main" id="{B8655116-F595-F242-8E56-BD173E367BFB}"/>
+              </a:ext>
+            </a:extLst>
+          </p:cNvPr>
+          <p:cNvPicPr>
+            <a:picLocks noChangeAspect="1"/>
+          </p:cNvPicPr>
+          <p:nvPr/>
+        </p:nvPicPr>
+        <p:blipFill>
+          <a:blip r:embed="rId5" cstate="email">
+            <a:extLst>
+              <a:ext uri="{28A0092B-C50C-407E-A947-70E740481C1C}">
+                <a14:useLocalDpi xmlns:a14="http://schemas.microsoft.com/office/drawing/2010/main"/>
+              </a:ext>
+            </a:extLst>
+          </a:blip>
+          <a:stretch>
+            <a:fillRect/>
+          </a:stretch>
+        </p:blipFill>
+        <p:spPr>
+          <a:xfrm>
+            <a:off x="6127427" y="247754"/>
+            <a:ext cx="2303120" cy="899745"/>
+          </a:xfrm>
+          <a:prstGeom prst="rect">
+            <a:avLst/>
+          </a:prstGeom>
+        </p:spPr>
+      </p:pic>
+      <p:pic>
+        <p:nvPicPr>
+          <p:cNvPr id="1030" name="Picture 6" descr="Emin Gün Sirer - Founder @ Ava Labs">
+            <a:extLst>
+              <a:ext uri="{FF2B5EF4-FFF2-40B4-BE49-F238E27FC236}">
+                <a16:creationId xmlns:a16="http://schemas.microsoft.com/office/drawing/2014/main" id="{78DB8FB8-AC9E-4248-94F8-7F9AF8B157B3}"/>
+              </a:ext>
+            </a:extLst>
+          </p:cNvPr>
+          <p:cNvPicPr>
+            <a:picLocks noChangeAspect="1" noChangeArrowheads="1"/>
+          </p:cNvPicPr>
+          <p:nvPr/>
+        </p:nvPicPr>
+        <p:blipFill>
+          <a:blip r:embed="rId6" cstate="email">
+            <a:extLst>
+              <a:ext uri="{28A0092B-C50C-407E-A947-70E740481C1C}">
+                <a14:useLocalDpi xmlns:a14="http://schemas.microsoft.com/office/drawing/2010/main"/>
+              </a:ext>
+            </a:extLst>
+          </a:blip>
+          <a:srcRect/>
+          <a:stretch>
+            <a:fillRect/>
+          </a:stretch>
+        </p:blipFill>
+        <p:spPr bwMode="auto">
+          <a:xfrm>
+            <a:off x="9891373" y="2358190"/>
+            <a:ext cx="1713297" cy="2141621"/>
+          </a:xfrm>
+          <a:prstGeom prst="rect">
+            <a:avLst/>
+          </a:prstGeom>
+          <a:noFill/>
+          <a:extLst>
+            <a:ext uri="{909E8E84-426E-40DD-AFC4-6F175D3DCCD1}">
+              <a14:hiddenFill xmlns:a14="http://schemas.microsoft.com/office/drawing/2010/main">
+                <a:solidFill>
+                  <a:srgbClr val="FFFFFF"/>
+                </a:solidFill>
+              </a14:hiddenFill>
+            </a:ext>
+          </a:extLst>
+        </p:spPr>
+      </p:pic>
+      <p:sp>
+        <p:nvSpPr>
+          <p:cNvPr id="7" name="TextBox 6">
+            <a:extLst>
+              <a:ext uri="{FF2B5EF4-FFF2-40B4-BE49-F238E27FC236}">
+                <a16:creationId xmlns:a16="http://schemas.microsoft.com/office/drawing/2014/main" id="{F0286F1D-4846-1640-98DF-121FC16CEA1B}"/>
+              </a:ext>
+            </a:extLst>
+          </p:cNvPr>
+          <p:cNvSpPr txBox="1"/>
+          <p:nvPr/>
+        </p:nvSpPr>
+        <p:spPr>
+          <a:xfrm>
+            <a:off x="9592989" y="4499811"/>
+            <a:ext cx="2310063" cy="523220"/>
+          </a:xfrm>
+          <a:prstGeom prst="rect">
+            <a:avLst/>
+          </a:prstGeom>
+          <a:noFill/>
+        </p:spPr>
+        <p:txBody>
+          <a:bodyPr wrap="square" rtlCol="0">
+            <a:spAutoFit/>
+          </a:bodyPr>
+          <a:lstStyle/>
+          <a:p>
+            <a:pPr algn="ctr"/>
+            <a:r>
+              <a:rPr lang="en-US" sz="1400"/>
+              <a:t>Emin Gün Sirer</a:t>
+            </a:r>
+          </a:p>
+          <a:p>
+            <a:pPr algn="ctr"/>
+            <a:r>
+              <a:rPr lang="en-US" sz="1400"/>
+              <a:t>Founder @ Ava Labs</a:t>
+            </a:r>
+          </a:p>
+        </p:txBody>
+      </p:sp>
+    </p:spTree>
+    <p:extLst>
+      <p:ext uri="{BB962C8B-B14F-4D97-AF65-F5344CB8AC3E}">
+        <p14:creationId xmlns:p14="http://schemas.microsoft.com/office/powerpoint/2010/main" val="898687112"/>
+      </p:ext>
+    </p:extLst>
+  </p:cSld>
+  <p:clrMapOvr>
+    <a:masterClrMapping/>
+  </p:clrMapOvr>
+</p:sld>
+</file>
+
+<file path=ppt/slides/slide9.xml><?xml version="1.0" encoding="utf-8"?>
+<p:sld xmlns:a="http://schemas.openxmlformats.org/drawingml/2006/main" xmlns:r="http://schemas.openxmlformats.org/officeDocument/2006/relationships" xmlns:p="http://schemas.openxmlformats.org/presentationml/2006/main">
+  <p:cSld>
+    <p:spTree>
+      <p:nvGrpSpPr>
+        <p:cNvPr id="1" name=""/>
+        <p:cNvGrpSpPr/>
+        <p:nvPr/>
+      </p:nvGrpSpPr>
+      <p:grpSpPr>
+        <a:xfrm>
+          <a:off x="0" y="0"/>
+          <a:ext cx="0" cy="0"/>
+          <a:chOff x="0" y="0"/>
+          <a:chExt cx="0" cy="0"/>
+        </a:xfrm>
+      </p:grpSpPr>
+      <p:sp>
+        <p:nvSpPr>
+          <p:cNvPr id="3" name="TextBox 2">
+            <a:extLst>
+              <a:ext uri="{FF2B5EF4-FFF2-40B4-BE49-F238E27FC236}">
+                <a16:creationId xmlns:a16="http://schemas.microsoft.com/office/drawing/2014/main" id="{5C8C8936-664F-7302-594B-D77781E9B064}"/>
+              </a:ext>
+            </a:extLst>
+          </p:cNvPr>
+          <p:cNvSpPr txBox="1"/>
+          <p:nvPr/>
+        </p:nvSpPr>
+        <p:spPr>
+          <a:xfrm>
+            <a:off x="0" y="0"/>
+            <a:ext cx="1551008" cy="523220"/>
+          </a:xfrm>
+          <a:prstGeom prst="rect">
+            <a:avLst/>
+          </a:prstGeom>
+          <a:noFill/>
+        </p:spPr>
+        <p:txBody>
+          <a:bodyPr wrap="square" rtlCol="0">
+            <a:spAutoFit/>
+          </a:bodyPr>
+          <a:lstStyle/>
+          <a:p>
+            <a:r>
+              <a:rPr lang="en-US" sz="2800" b="1"/>
+              <a:t>Helium</a:t>
+            </a:r>
+          </a:p>
+        </p:txBody>
+      </p:sp>
+      <p:pic>
+        <p:nvPicPr>
+          <p:cNvPr id="5" name="Picture 4">
+            <a:extLst>
+              <a:ext uri="{FF2B5EF4-FFF2-40B4-BE49-F238E27FC236}">
+                <a16:creationId xmlns:a16="http://schemas.microsoft.com/office/drawing/2014/main" id="{98004987-FD7F-44C7-5E3E-0D398237B49C}"/>
+              </a:ext>
+            </a:extLst>
+          </p:cNvPr>
+          <p:cNvPicPr>
+            <a:picLocks noChangeAspect="1"/>
+          </p:cNvPicPr>
+          <p:nvPr/>
+        </p:nvPicPr>
+        <p:blipFill>
+          <a:blip r:embed="rId2" cstate="email">
+            <a:extLst>
+              <a:ext uri="{28A0092B-C50C-407E-A947-70E740481C1C}">
+                <a14:useLocalDpi xmlns:a14="http://schemas.microsoft.com/office/drawing/2010/main"/>
+              </a:ext>
+            </a:extLst>
+          </a:blip>
+          <a:stretch>
+            <a:fillRect/>
+          </a:stretch>
+        </p:blipFill>
+        <p:spPr>
+          <a:xfrm>
+            <a:off x="8748816" y="0"/>
+            <a:ext cx="3443184" cy="1192192"/>
+          </a:xfrm>
+          <a:prstGeom prst="rect">
+            <a:avLst/>
+          </a:prstGeom>
+        </p:spPr>
+      </p:pic>
+      <p:sp>
+        <p:nvSpPr>
+          <p:cNvPr id="6" name="TextBox 5">
+            <a:extLst>
+              <a:ext uri="{FF2B5EF4-FFF2-40B4-BE49-F238E27FC236}">
+                <a16:creationId xmlns:a16="http://schemas.microsoft.com/office/drawing/2014/main" id="{2DD6779D-B1E5-D965-3C21-C149B9403733}"/>
+              </a:ext>
+            </a:extLst>
+          </p:cNvPr>
+          <p:cNvSpPr txBox="1"/>
+          <p:nvPr/>
+        </p:nvSpPr>
+        <p:spPr>
+          <a:xfrm>
+            <a:off x="247749" y="846559"/>
+            <a:ext cx="6007260" cy="4616648"/>
+          </a:xfrm>
+          <a:prstGeom prst="rect">
+            <a:avLst/>
+          </a:prstGeom>
+          <a:noFill/>
+        </p:spPr>
+        <p:txBody>
+          <a:bodyPr wrap="square" rtlCol="0">
+            <a:spAutoFit/>
+          </a:bodyPr>
+          <a:lstStyle/>
+          <a:p>
+            <a:pPr marL="285750" indent="-285750">
+              <a:buFont typeface="Arial" panose="020B0604020202020204" pitchFamily="34" charset="0"/>
+              <a:buChar char="•"/>
+            </a:pPr>
+            <a:r>
+              <a:rPr lang="en-US" sz="1400" b="1">
+                <a:solidFill>
+                  <a:srgbClr val="FF0000"/>
+                </a:solidFill>
+              </a:rPr>
+              <a:t>Helium</a:t>
+            </a:r>
+            <a:r>
+              <a:rPr lang="en-US" sz="1400"/>
+              <a:t> provides low-cost connectivity for IoT devices (much cheaper than WiFi). Individuals can install Helium routers or, "hot spots," at their homes or offices and earn </a:t>
+            </a:r>
+            <a:r>
+              <a:rPr lang="en-US" sz="1400" b="1">
+                <a:solidFill>
+                  <a:srgbClr val="FF0000"/>
+                </a:solidFill>
+              </a:rPr>
+              <a:t>HNT</a:t>
+            </a:r>
+            <a:r>
+              <a:rPr lang="en-US" sz="1400"/>
+              <a:t> (crypto token) for providing connectivity.</a:t>
+            </a:r>
+          </a:p>
+          <a:p>
+            <a:pPr marL="285750" indent="-285750">
+              <a:buFont typeface="Arial" panose="020B0604020202020204" pitchFamily="34" charset="0"/>
+              <a:buChar char="•"/>
+            </a:pPr>
+            <a:r>
+              <a:rPr lang="en-US" sz="1400" b="1">
+                <a:solidFill>
+                  <a:srgbClr val="FF0000"/>
+                </a:solidFill>
+              </a:rPr>
+              <a:t>HNT</a:t>
+            </a:r>
+            <a:r>
+              <a:rPr lang="en-US" sz="1400"/>
+              <a:t> token - the 46th-largest cryptocurrency by market cap (~3 Bln)</a:t>
+            </a:r>
+          </a:p>
+          <a:p>
+            <a:pPr marL="285750" indent="-285750">
+              <a:buFont typeface="Arial" panose="020B0604020202020204" pitchFamily="34" charset="0"/>
+              <a:buChar char="•"/>
+            </a:pPr>
+            <a:r>
+              <a:rPr lang="en-US" sz="1400"/>
+              <a:t>Helium Inc. was founded in 2013 in San Francisco, CA. It specializes in IoT, blockchain technology development, routers and networks</a:t>
+            </a:r>
+          </a:p>
+          <a:p>
+            <a:pPr marL="285750" indent="-285750">
+              <a:buFont typeface="Arial" panose="020B0604020202020204" pitchFamily="34" charset="0"/>
+              <a:buChar char="•"/>
+            </a:pPr>
+            <a:r>
+              <a:rPr lang="en-US" sz="1400"/>
+              <a:t>The </a:t>
+            </a:r>
+            <a:r>
+              <a:rPr lang="en-US" sz="1400" b="1">
+                <a:solidFill>
+                  <a:srgbClr val="FF0000"/>
+                </a:solidFill>
+              </a:rPr>
+              <a:t>Helium</a:t>
+            </a:r>
+            <a:r>
+              <a:rPr lang="en-US" sz="1400"/>
+              <a:t> hot spots provide a long-range form of WiFi called </a:t>
+            </a:r>
+            <a:r>
+              <a:rPr lang="en-US" sz="1400" b="1">
+                <a:solidFill>
+                  <a:srgbClr val="FF0000"/>
+                </a:solidFill>
+              </a:rPr>
+              <a:t>LongFi</a:t>
+            </a:r>
+            <a:r>
+              <a:rPr lang="en-US" sz="1400"/>
+              <a:t> that reportedly reaches 200 times farther than a traditional WiFi hot spot, or as much as 10 miles depending on environmental conditions.</a:t>
+            </a:r>
+          </a:p>
+          <a:p>
+            <a:pPr marL="285750" indent="-285750">
+              <a:buFont typeface="Arial" panose="020B0604020202020204" pitchFamily="34" charset="0"/>
+              <a:buChar char="•"/>
+            </a:pPr>
+            <a:r>
+              <a:rPr lang="en-US" sz="1400"/>
+              <a:t>In October 2021, DISH Network said it was partnering with Helium to "support open source and low-cost wireless connectivity ecosystems" and utilizing Helium to roll out 5G . The city of San Jose, California, became the first city to officially join the Helium network and will use Helium to provide internet access for low-income residents. </a:t>
+            </a:r>
+          </a:p>
+          <a:p>
+            <a:pPr marL="285750" indent="-285750">
+              <a:buFont typeface="Arial" panose="020B0604020202020204" pitchFamily="34" charset="0"/>
+              <a:buChar char="•"/>
+            </a:pPr>
+            <a:r>
+              <a:rPr lang="en-US" sz="1400" b="1">
+                <a:solidFill>
+                  <a:srgbClr val="FF0000"/>
+                </a:solidFill>
+              </a:rPr>
+              <a:t>Helium</a:t>
+            </a:r>
+            <a:r>
+              <a:rPr lang="en-US" sz="1400"/>
+              <a:t> is energy efficient. It uses "proof of coverage consensus" (essentially verifying that routers are located where they claim and that they are running and providing coverage). It uses much less energy: about five watts to run, or the equivalent of having an LED light bulb on.</a:t>
+            </a:r>
+          </a:p>
+          <a:p>
+            <a:pPr marL="285750" indent="-285750">
+              <a:buFont typeface="Arial" panose="020B0604020202020204" pitchFamily="34" charset="0"/>
+              <a:buChar char="•"/>
+            </a:pPr>
+            <a:r>
+              <a:rPr lang="en-US" sz="1400"/>
+              <a:t>One big risk – ISPs (internet service providers) may prohibit their customers from using </a:t>
+            </a:r>
+            <a:r>
+              <a:rPr lang="en-US" sz="1400" b="1">
+                <a:solidFill>
+                  <a:srgbClr val="FF0000"/>
+                </a:solidFill>
+              </a:rPr>
+              <a:t>Helium</a:t>
+            </a:r>
+            <a:r>
+              <a:rPr lang="en-US" sz="1400"/>
+              <a:t> hot spots because reselling their bandwidth could violate their terms of service.</a:t>
+            </a:r>
+          </a:p>
+        </p:txBody>
+      </p:sp>
+      <p:pic>
+        <p:nvPicPr>
+          <p:cNvPr id="7" name="Picture 6">
+            <a:extLst>
+              <a:ext uri="{FF2B5EF4-FFF2-40B4-BE49-F238E27FC236}">
+                <a16:creationId xmlns:a16="http://schemas.microsoft.com/office/drawing/2014/main" id="{48ADC555-D9FA-A135-90BE-028219B44351}"/>
+              </a:ext>
+            </a:extLst>
+          </p:cNvPr>
+          <p:cNvPicPr>
+            <a:picLocks noChangeAspect="1"/>
+          </p:cNvPicPr>
+          <p:nvPr/>
+        </p:nvPicPr>
+        <p:blipFill>
+          <a:blip r:embed="rId3" cstate="email">
+            <a:extLst>
+              <a:ext uri="{28A0092B-C50C-407E-A947-70E740481C1C}">
+                <a14:useLocalDpi xmlns:a14="http://schemas.microsoft.com/office/drawing/2010/main"/>
+              </a:ext>
+            </a:extLst>
+          </a:blip>
+          <a:stretch>
+            <a:fillRect/>
+          </a:stretch>
+        </p:blipFill>
+        <p:spPr>
+          <a:xfrm>
+            <a:off x="10267313" y="1533699"/>
+            <a:ext cx="1466847" cy="1629137"/>
+          </a:xfrm>
+          <a:prstGeom prst="rect">
+            <a:avLst/>
+          </a:prstGeom>
+        </p:spPr>
+      </p:pic>
+      <p:pic>
+        <p:nvPicPr>
+          <p:cNvPr id="8" name="Picture 7">
+            <a:extLst>
+              <a:ext uri="{FF2B5EF4-FFF2-40B4-BE49-F238E27FC236}">
+                <a16:creationId xmlns:a16="http://schemas.microsoft.com/office/drawing/2014/main" id="{F220B1AD-5E78-D480-2B67-8D7ACEBC08F2}"/>
+              </a:ext>
+            </a:extLst>
+          </p:cNvPr>
+          <p:cNvPicPr>
+            <a:picLocks noChangeAspect="1"/>
+          </p:cNvPicPr>
+          <p:nvPr/>
+        </p:nvPicPr>
+        <p:blipFill>
+          <a:blip r:embed="rId4" cstate="email">
+            <a:extLst>
+              <a:ext uri="{28A0092B-C50C-407E-A947-70E740481C1C}">
+                <a14:useLocalDpi xmlns:a14="http://schemas.microsoft.com/office/drawing/2010/main"/>
+              </a:ext>
+            </a:extLst>
+          </a:blip>
+          <a:stretch>
+            <a:fillRect/>
+          </a:stretch>
+        </p:blipFill>
+        <p:spPr>
+          <a:xfrm>
+            <a:off x="6964466" y="1293707"/>
+            <a:ext cx="1784350" cy="1295400"/>
+          </a:xfrm>
+          <a:prstGeom prst="rect">
+            <a:avLst/>
+          </a:prstGeom>
+        </p:spPr>
+      </p:pic>
+      <p:pic>
+        <p:nvPicPr>
+          <p:cNvPr id="9" name="Picture 8">
+            <a:extLst>
+              <a:ext uri="{FF2B5EF4-FFF2-40B4-BE49-F238E27FC236}">
+                <a16:creationId xmlns:a16="http://schemas.microsoft.com/office/drawing/2014/main" id="{6FC97D1D-E050-D880-BF9A-76B1AED51E16}"/>
+              </a:ext>
+            </a:extLst>
+          </p:cNvPr>
+          <p:cNvPicPr>
+            <a:picLocks noChangeAspect="1"/>
+          </p:cNvPicPr>
+          <p:nvPr/>
+        </p:nvPicPr>
+        <p:blipFill>
+          <a:blip r:embed="rId5" cstate="email">
+            <a:extLst>
+              <a:ext uri="{28A0092B-C50C-407E-A947-70E740481C1C}">
+                <a14:useLocalDpi xmlns:a14="http://schemas.microsoft.com/office/drawing/2010/main"/>
+              </a:ext>
+            </a:extLst>
+          </a:blip>
+          <a:stretch>
+            <a:fillRect/>
+          </a:stretch>
+        </p:blipFill>
+        <p:spPr>
+          <a:xfrm>
+            <a:off x="9556145" y="3429000"/>
+            <a:ext cx="1828525" cy="1295400"/>
+          </a:xfrm>
+          <a:prstGeom prst="rect">
+            <a:avLst/>
+          </a:prstGeom>
+        </p:spPr>
+      </p:pic>
+      <p:pic>
+        <p:nvPicPr>
+          <p:cNvPr id="10" name="Picture 9">
+            <a:extLst>
+              <a:ext uri="{FF2B5EF4-FFF2-40B4-BE49-F238E27FC236}">
+                <a16:creationId xmlns:a16="http://schemas.microsoft.com/office/drawing/2014/main" id="{A474ACC6-5CC5-A730-7B36-877288F65F99}"/>
+              </a:ext>
+            </a:extLst>
+          </p:cNvPr>
+          <p:cNvPicPr>
+            <a:picLocks noChangeAspect="1"/>
+          </p:cNvPicPr>
+          <p:nvPr/>
+        </p:nvPicPr>
+        <p:blipFill>
+          <a:blip r:embed="rId6" cstate="email">
+            <a:extLst>
+              <a:ext uri="{28A0092B-C50C-407E-A947-70E740481C1C}">
+                <a14:useLocalDpi xmlns:a14="http://schemas.microsoft.com/office/drawing/2010/main"/>
+              </a:ext>
+            </a:extLst>
+          </a:blip>
+          <a:stretch>
+            <a:fillRect/>
+          </a:stretch>
+        </p:blipFill>
+        <p:spPr>
+          <a:xfrm>
+            <a:off x="7773506" y="2888301"/>
+            <a:ext cx="1373098" cy="1347352"/>
+          </a:xfrm>
+          <a:prstGeom prst="rect">
+            <a:avLst/>
+          </a:prstGeom>
+        </p:spPr>
+      </p:pic>
+      <p:pic>
+        <p:nvPicPr>
+          <p:cNvPr id="11" name="Picture 10">
+            <a:extLst>
+              <a:ext uri="{FF2B5EF4-FFF2-40B4-BE49-F238E27FC236}">
+                <a16:creationId xmlns:a16="http://schemas.microsoft.com/office/drawing/2014/main" id="{201DBCFD-FD5B-D82C-FC07-1F9F0E48A95E}"/>
+              </a:ext>
+            </a:extLst>
+          </p:cNvPr>
+          <p:cNvPicPr>
+            <a:picLocks noChangeAspect="1"/>
+          </p:cNvPicPr>
+          <p:nvPr/>
+        </p:nvPicPr>
+        <p:blipFill>
+          <a:blip r:embed="rId7" cstate="email">
+            <a:extLst>
+              <a:ext uri="{28A0092B-C50C-407E-A947-70E740481C1C}">
+                <a14:useLocalDpi xmlns:a14="http://schemas.microsoft.com/office/drawing/2010/main"/>
+              </a:ext>
+            </a:extLst>
+          </a:blip>
+          <a:stretch>
+            <a:fillRect/>
+          </a:stretch>
+        </p:blipFill>
+        <p:spPr>
+          <a:xfrm>
+            <a:off x="7379493" y="4534508"/>
+            <a:ext cx="1486811" cy="2016763"/>
           </a:xfrm>
           <a:prstGeom prst="rect">
             <a:avLst/>
@@ -9519,7 +8706,7 @@
     </p:spTree>
     <p:extLst>
       <p:ext uri="{BB962C8B-B14F-4D97-AF65-F5344CB8AC3E}">
-        <p14:creationId xmlns:p14="http://schemas.microsoft.com/office/powerpoint/2010/main" val="2508513910"/>
+        <p14:creationId xmlns:p14="http://schemas.microsoft.com/office/powerpoint/2010/main" val="875803744"/>
       </p:ext>
     </p:extLst>
   </p:cSld>

--- a/crypto_03_currencies.pptx
+++ b/crypto_03_currencies.pptx
@@ -695,7 +695,7 @@
           <a:lstStyle/>
           <a:p>
             <a:fld id="{EB1FAE4C-5332-014D-8E1B-BB8DA73EF81D}" type="datetimeFigureOut">
-              <a:t>5/2/22</a:t>
+              <a:t>5/5/22</a:t>
             </a:fld>
             <a:endParaRPr lang="en-US"/>
           </a:p>
@@ -864,7 +864,7 @@
           <a:lstStyle/>
           <a:p>
             <a:fld id="{EB1FAE4C-5332-014D-8E1B-BB8DA73EF81D}" type="datetimeFigureOut">
-              <a:t>5/2/22</a:t>
+              <a:t>5/5/22</a:t>
             </a:fld>
             <a:endParaRPr lang="en-US"/>
           </a:p>
@@ -1043,7 +1043,7 @@
           <a:lstStyle/>
           <a:p>
             <a:fld id="{EB1FAE4C-5332-014D-8E1B-BB8DA73EF81D}" type="datetimeFigureOut">
-              <a:t>5/2/22</a:t>
+              <a:t>5/5/22</a:t>
             </a:fld>
             <a:endParaRPr lang="en-US"/>
           </a:p>
@@ -1212,7 +1212,7 @@
           <a:lstStyle/>
           <a:p>
             <a:fld id="{EB1FAE4C-5332-014D-8E1B-BB8DA73EF81D}" type="datetimeFigureOut">
-              <a:t>5/2/22</a:t>
+              <a:t>5/5/22</a:t>
             </a:fld>
             <a:endParaRPr lang="en-US"/>
           </a:p>
@@ -1458,7 +1458,7 @@
           <a:lstStyle/>
           <a:p>
             <a:fld id="{EB1FAE4C-5332-014D-8E1B-BB8DA73EF81D}" type="datetimeFigureOut">
-              <a:t>5/2/22</a:t>
+              <a:t>5/5/22</a:t>
             </a:fld>
             <a:endParaRPr lang="en-US"/>
           </a:p>
@@ -1688,7 +1688,7 @@
           <a:lstStyle/>
           <a:p>
             <a:fld id="{EB1FAE4C-5332-014D-8E1B-BB8DA73EF81D}" type="datetimeFigureOut">
-              <a:t>5/2/22</a:t>
+              <a:t>5/5/22</a:t>
             </a:fld>
             <a:endParaRPr lang="en-US"/>
           </a:p>
@@ -2053,7 +2053,7 @@
           <a:lstStyle/>
           <a:p>
             <a:fld id="{EB1FAE4C-5332-014D-8E1B-BB8DA73EF81D}" type="datetimeFigureOut">
-              <a:t>5/2/22</a:t>
+              <a:t>5/5/22</a:t>
             </a:fld>
             <a:endParaRPr lang="en-US"/>
           </a:p>
@@ -2171,7 +2171,7 @@
           <a:lstStyle/>
           <a:p>
             <a:fld id="{EB1FAE4C-5332-014D-8E1B-BB8DA73EF81D}" type="datetimeFigureOut">
-              <a:t>5/2/22</a:t>
+              <a:t>5/5/22</a:t>
             </a:fld>
             <a:endParaRPr lang="en-US"/>
           </a:p>
@@ -2267,7 +2267,7 @@
           <a:lstStyle/>
           <a:p>
             <a:fld id="{EB1FAE4C-5332-014D-8E1B-BB8DA73EF81D}" type="datetimeFigureOut">
-              <a:t>5/2/22</a:t>
+              <a:t>5/5/22</a:t>
             </a:fld>
             <a:endParaRPr lang="en-US"/>
           </a:p>
@@ -2542,7 +2542,7 @@
           <a:lstStyle/>
           <a:p>
             <a:fld id="{EB1FAE4C-5332-014D-8E1B-BB8DA73EF81D}" type="datetimeFigureOut">
-              <a:t>5/2/22</a:t>
+              <a:t>5/5/22</a:t>
             </a:fld>
             <a:endParaRPr lang="en-US"/>
           </a:p>
@@ -2798,7 +2798,7 @@
           <a:lstStyle/>
           <a:p>
             <a:fld id="{EB1FAE4C-5332-014D-8E1B-BB8DA73EF81D}" type="datetimeFigureOut">
-              <a:t>5/2/22</a:t>
+              <a:t>5/5/22</a:t>
             </a:fld>
             <a:endParaRPr lang="en-US"/>
           </a:p>
@@ -3010,7 +3010,7 @@
           </a:lstStyle>
           <a:p>
             <a:fld id="{EB1FAE4C-5332-014D-8E1B-BB8DA73EF81D}" type="datetimeFigureOut">
-              <a:t>5/2/22</a:t>
+              <a:t>5/5/22</a:t>
             </a:fld>
             <a:endParaRPr lang="en-US"/>
           </a:p>
@@ -3480,7 +3480,7 @@
         <p:spPr>
           <a:xfrm>
             <a:off x="4451098" y="1877372"/>
-            <a:ext cx="3289803" cy="2862322"/>
+            <a:ext cx="3289803" cy="3416320"/>
           </a:xfrm>
           <a:prstGeom prst="rect">
             <a:avLst/>
@@ -3539,7 +3539,7 @@
             </a:pPr>
             <a:r>
               <a:rPr lang="en-US"/>
-              <a:t>Light Coin</a:t>
+              <a:t>Stable Coins</a:t>
             </a:r>
           </a:p>
           <a:p>
@@ -3568,9 +3568,31 @@
               <a:buChar char="•"/>
             </a:pPr>
             <a:r>
+              <a:rPr lang="en-US" b="1"/>
+              <a:t>Helium</a:t>
+            </a:r>
+            <a:endParaRPr lang="en-US"/>
+          </a:p>
+          <a:p>
+            <a:pPr marL="380990" indent="-380990">
+              <a:buFont typeface="Arial" panose="020B0604020202020204" pitchFamily="34" charset="0"/>
+              <a:buChar char="•"/>
+            </a:pPr>
+            <a:r>
               <a:rPr lang="en-US"/>
               <a:t>Dogecoin</a:t>
             </a:r>
+          </a:p>
+          <a:p>
+            <a:pPr marL="380990" indent="-380990">
+              <a:buFont typeface="Arial" panose="020B0604020202020204" pitchFamily="34" charset="0"/>
+              <a:buChar char="•"/>
+            </a:pPr>
+            <a:r>
+              <a:rPr lang="en-US" b="1"/>
+              <a:t>Monero</a:t>
+            </a:r>
+            <a:endParaRPr lang="en-US"/>
           </a:p>
           <a:p>
             <a:pPr marL="380990" indent="-380990">
@@ -7793,7 +7815,7 @@
         <p:spPr>
           <a:xfrm>
             <a:off x="92502" y="1471494"/>
-            <a:ext cx="6551366" cy="3108543"/>
+            <a:ext cx="6551366" cy="3323987"/>
           </a:xfrm>
           <a:prstGeom prst="rect">
             <a:avLst/>
@@ -7831,6 +7853,29 @@
               <a:t>Ethereum</a:t>
             </a:r>
             <a:endParaRPr lang="en-US" sz="1400"/>
+          </a:p>
+          <a:p>
+            <a:pPr marL="380990" indent="-380990">
+              <a:buFont typeface="Arial" panose="020B0604020202020204" pitchFamily="34" charset="0"/>
+              <a:buChar char="•"/>
+            </a:pPr>
+            <a:r>
+              <a:rPr lang="en-US" sz="1400" b="1">
+                <a:solidFill>
+                  <a:srgbClr val="FF0000"/>
+                </a:solidFill>
+              </a:rPr>
+              <a:t>$16 Bln </a:t>
+            </a:r>
+            <a:r>
+              <a:rPr lang="en-US" sz="1400"/>
+              <a:t>Market Cap (April 2022)</a:t>
+            </a:r>
+            <a:endParaRPr lang="en-US" sz="1400" b="1">
+              <a:solidFill>
+                <a:srgbClr val="FF0000"/>
+              </a:solidFill>
+            </a:endParaRPr>
           </a:p>
           <a:p>
             <a:pPr marL="380990" indent="-380990">

--- a/crypto_03_currencies.pptx
+++ b/crypto_03_currencies.pptx
@@ -3568,10 +3568,9 @@
               <a:buChar char="•"/>
             </a:pPr>
             <a:r>
-              <a:rPr lang="en-US" b="1"/>
+              <a:rPr lang="en-US"/>
               <a:t>Helium</a:t>
             </a:r>
-            <a:endParaRPr lang="en-US"/>
           </a:p>
           <a:p>
             <a:pPr marL="380990" indent="-380990">
@@ -3589,10 +3588,9 @@
               <a:buChar char="•"/>
             </a:pPr>
             <a:r>
-              <a:rPr lang="en-US" b="1"/>
+              <a:rPr lang="en-US"/>
               <a:t>Monero</a:t>
             </a:r>
-            <a:endParaRPr lang="en-US"/>
           </a:p>
           <a:p>
             <a:pPr marL="380990" indent="-380990">
@@ -3877,7 +3875,7 @@
         <p:spPr bwMode="auto">
           <a:xfrm>
             <a:off x="9366248" y="337423"/>
-            <a:ext cx="2540000" cy="2540000"/>
+            <a:ext cx="2542032" cy="2542032"/>
           </a:xfrm>
           <a:prstGeom prst="rect">
             <a:avLst/>
@@ -5545,7 +5543,7 @@
         <p:spPr>
           <a:xfrm>
             <a:off x="42333" y="0"/>
-            <a:ext cx="6619724" cy="738664"/>
+            <a:ext cx="5383107" cy="738664"/>
           </a:xfrm>
           <a:prstGeom prst="rect">
             <a:avLst/>
